--- a/docs/demos/spain-ehds-5-slides.pptx
+++ b/docs/demos/spain-ehds-5-slides.pptx
@@ -3321,7 +3321,7 @@
                 </a:solidFill>
                 <a:latin typeface="Calibri"/>
               </a:rPr>
-              <a:t>Building a federated European Health Data Space</a:t>
+              <a:t>One health record that follows the citizen</a:t>
             </a:r>
           </a:p>
         </p:txBody>
@@ -3567,7 +3567,7 @@
                 </a:solidFill>
                 <a:latin typeface="Calibri"/>
               </a:rPr>
-              <a:t>Primary use of data</a:t>
+              <a:t>Art. 3: their own record, at once</a:t>
             </a:r>
           </a:p>
         </p:txBody>
@@ -3735,7 +3735,7 @@
                 </a:solidFill>
                 <a:latin typeface="Calibri"/>
               </a:rPr>
-              <a:t>Hospitals in different regions cannot see what care a patient already received elsewhere, so tests repeat.</a:t>
+              <a:t>Hospitals in another region cannot see the care a patient already received, so tests are repeated.</a:t>
             </a:r>
           </a:p>
         </p:txBody>
@@ -3774,7 +3774,7 @@
                 </a:solidFill>
                 <a:latin typeface="Calibri"/>
               </a:rPr>
-              <a:t>Primary use of data</a:t>
+              <a:t>Art. 11: access at the bedside</a:t>
             </a:r>
           </a:p>
         </p:txBody>
@@ -3903,7 +3903,7 @@
                 </a:solidFill>
                 <a:latin typeface="Calibri"/>
               </a:rPr>
-              <a:t>Researchers</a:t>
+              <a:t>Across Europe</a:t>
             </a:r>
           </a:p>
         </p:txBody>
@@ -3942,7 +3942,7 @@
                 </a:solidFill>
                 <a:latin typeface="Calibri"/>
               </a:rPr>
-              <a:t>Studying a rare disease across Spain means asking 17 separate regions for permission and data.</a:t>
+              <a:t>A prescription issued in Spain should be dispensable in any Member State. Today it usually is not.</a:t>
             </a:r>
           </a:p>
         </p:txBody>
@@ -3981,7 +3981,7 @@
                 </a:solidFill>
                 <a:latin typeface="Calibri"/>
               </a:rPr>
-              <a:t>Secondary use of data</a:t>
+              <a:t>Art. 23: MyHealth@EU</a:t>
             </a:r>
           </a:p>
         </p:txBody>
@@ -4098,7 +4098,7 @@
                 </a:solidFill>
                 <a:latin typeface="Calibri"/>
               </a:rPr>
-              <a:t>Introduction for the Spanish Ministry of Health  ·  Regulation (EU) 2025/327</a:t>
+              <a:t>Primary use, Chapter II of Regulation (EU) 2025/327  ·  data.europa.eu/eli/reg/2025/327/oj</a:t>
             </a:r>
           </a:p>
         </p:txBody>
@@ -4173,8 +4173,8 @@
         </p:nvSpPr>
         <p:spPr>
           <a:xfrm>
-            <a:off x="548640" y="320040"/>
-            <a:ext cx="10972800" cy="640080"/>
+            <a:off x="548640" y="292608"/>
+            <a:ext cx="10972800" cy="502920"/>
           </a:xfrm>
           <a:prstGeom prst="rect">
             <a:avLst/>
@@ -4193,13 +4193,13 @@
               </a:lnSpc>
             </a:pPr>
             <a:r>
-              <a:rPr sz="3000" b="1">
+              <a:rPr sz="2700" b="1">
                 <a:solidFill>
                   <a:srgbClr val="143D59"/>
                 </a:solidFill>
                 <a:latin typeface="Calibri"/>
               </a:rPr>
-              <a:t>What we have already built</a:t>
+              <a:t>When care does not follow the citizen</a:t>
             </a:r>
           </a:p>
         </p:txBody>
@@ -4212,8 +4212,8 @@
         </p:nvSpPr>
         <p:spPr>
           <a:xfrm>
-            <a:off x="548640" y="960120"/>
-            <a:ext cx="10972800" cy="411480"/>
+            <a:off x="548640" y="859536"/>
+            <a:ext cx="10972800" cy="365760"/>
           </a:xfrm>
           <a:prstGeom prst="rect">
             <a:avLst/>
@@ -4232,13 +4232,13 @@
               </a:lnSpc>
             </a:pPr>
             <a:r>
-              <a:rPr sz="1600" b="0">
+              <a:rPr sz="1400" b="0">
                 <a:solidFill>
                   <a:srgbClr val="4F5560"/>
                 </a:solidFill>
                 <a:latin typeface="Calibri"/>
               </a:rPr>
-              <a:t>A working EHDS demonstrator. Synthetic data, real protocols, real sign-in.</a:t>
+              <a:t>Primary use. Continuous, safe care across all 17 regions, and across the border.</a:t>
             </a:r>
           </a:p>
         </p:txBody>
@@ -4284,7 +4284,7 @@
       </p:sp>
       <p:pic>
         <p:nvPicPr>
-          <p:cNvPr id="6" name="Picture 5" descr="ehds-secondary-journey-bilingual.png"/>
+          <p:cNvPr id="6" name="Picture 5" descr="image.png"/>
           <p:cNvPicPr>
             <a:picLocks noChangeAspect="1"/>
           </p:cNvPicPr>
@@ -4298,8 +4298,8 @@
         </p:blipFill>
         <p:spPr>
           <a:xfrm>
-            <a:off x="548640" y="1691640"/>
-            <a:ext cx="6766560" cy="3758184"/>
+            <a:off x="548640" y="1325880"/>
+            <a:ext cx="6583680" cy="4937760"/>
           </a:xfrm>
           <a:prstGeom prst="rect">
             <a:avLst/>
@@ -4314,8 +4314,8 @@
         </p:nvSpPr>
         <p:spPr>
           <a:xfrm>
-            <a:off x="7589520" y="1691640"/>
-            <a:ext cx="4050791" cy="1170432"/>
+            <a:off x="7360920" y="1325880"/>
+            <a:ext cx="4279392" cy="3200400"/>
           </a:xfrm>
           <a:prstGeom prst="roundRect">
             <a:avLst>
@@ -4360,8 +4360,8 @@
         </p:nvSpPr>
         <p:spPr>
           <a:xfrm>
-            <a:off x="7589520" y="1691640"/>
-            <a:ext cx="4050791" cy="384048"/>
+            <a:off x="7360920" y="1325880"/>
+            <a:ext cx="4279392" cy="384048"/>
           </a:xfrm>
           <a:prstGeom prst="rect">
             <a:avLst/>
@@ -4404,8 +4404,8 @@
         </p:nvSpPr>
         <p:spPr>
           <a:xfrm>
-            <a:off x="7790688" y="1764792"/>
-            <a:ext cx="3648456" cy="310896"/>
+            <a:off x="7562088" y="1399032"/>
+            <a:ext cx="3877055" cy="310896"/>
           </a:xfrm>
           <a:prstGeom prst="rect">
             <a:avLst/>
@@ -4424,13 +4424,13 @@
               </a:lnSpc>
             </a:pPr>
             <a:r>
-              <a:rPr sz="1300" b="1">
+              <a:rPr sz="1500" b="1">
                 <a:solidFill>
                   <a:srgbClr val="FFFFFF"/>
                 </a:solidFill>
                 <a:latin typeface="Calibri"/>
               </a:rPr>
-              <a:t>The journey, end to end</a:t>
+              <a:t>What the citizen gets, by right</a:t>
             </a:r>
           </a:p>
         </p:txBody>
@@ -4443,8 +4443,8 @@
         </p:nvSpPr>
         <p:spPr>
           <a:xfrm>
-            <a:off x="7790688" y="2258568"/>
-            <a:ext cx="3648456" cy="438912"/>
+            <a:off x="7562088" y="1892807"/>
+            <a:ext cx="3877055" cy="2468880"/>
           </a:xfrm>
           <a:prstGeom prst="rect">
             <a:avLst/>
@@ -4463,13 +4463,109 @@
               </a:lnSpc>
             </a:pPr>
             <a:r>
-              <a:rPr sz="1100" b="0">
+              <a:rPr sz="1250" b="0">
                 <a:solidFill>
                   <a:srgbClr val="4F5560"/>
                 </a:solidFill>
                 <a:latin typeface="Calibri"/>
               </a:rPr>
-              <a:t>Onboarding, catalogue, discovery, negotiation, FHIR transfer, secure processing, audit. Eight steps, each one a real page a regulator can click.</a:t>
+              <a:t>•  See their own record, at once and free   Art. 3</a:t>
+            </a:r>
+          </a:p>
+          <a:p>
+            <a:pPr>
+              <a:lnSpc>
+                <a:spcPct val="108000"/>
+              </a:lnSpc>
+            </a:pPr>
+            <a:r>
+              <a:rPr sz="1250" b="0">
+                <a:solidFill>
+                  <a:srgbClr val="4F5560"/>
+                </a:solidFill>
+                <a:latin typeface="Calibri"/>
+              </a:rPr>
+              <a:t>•  Add their own information to it   Art. 5</a:t>
+            </a:r>
+          </a:p>
+          <a:p>
+            <a:pPr>
+              <a:lnSpc>
+                <a:spcPct val="108000"/>
+              </a:lnSpc>
+            </a:pPr>
+            <a:r>
+              <a:rPr sz="1250" b="0">
+                <a:solidFill>
+                  <a:srgbClr val="4F5560"/>
+                </a:solidFill>
+                <a:latin typeface="Calibri"/>
+              </a:rPr>
+              <a:t>•  Have what is wrong corrected   Art. 6</a:t>
+            </a:r>
+          </a:p>
+          <a:p>
+            <a:pPr>
+              <a:lnSpc>
+                <a:spcPct val="108000"/>
+              </a:lnSpc>
+            </a:pPr>
+            <a:r>
+              <a:rPr sz="1250" b="0">
+                <a:solidFill>
+                  <a:srgbClr val="4F5560"/>
+                </a:solidFill>
+                <a:latin typeface="Calibri"/>
+              </a:rPr>
+              <a:t>•  Take a copy anywhere in the Union   Art. 7</a:t>
+            </a:r>
+          </a:p>
+          <a:p>
+            <a:pPr>
+              <a:lnSpc>
+                <a:spcPct val="108000"/>
+              </a:lnSpc>
+            </a:pPr>
+            <a:r>
+              <a:rPr sz="1250" b="0">
+                <a:solidFill>
+                  <a:srgbClr val="4F5560"/>
+                </a:solidFill>
+                <a:latin typeface="Calibri"/>
+              </a:rPr>
+              <a:t>•  Restrict who is allowed to look   Art. 8</a:t>
+            </a:r>
+          </a:p>
+          <a:p>
+            <a:pPr>
+              <a:lnSpc>
+                <a:spcPct val="108000"/>
+              </a:lnSpc>
+            </a:pPr>
+            <a:r>
+              <a:rPr sz="1250" b="0">
+                <a:solidFill>
+                  <a:srgbClr val="4F5560"/>
+                </a:solidFill>
+                <a:latin typeface="Calibri"/>
+              </a:rPr>
+              <a:t>•  See who actually did look   Art. 9</a:t>
+            </a:r>
+          </a:p>
+          <a:p>
+            <a:pPr>
+              <a:lnSpc>
+                <a:spcPct val="108000"/>
+              </a:lnSpc>
+            </a:pPr>
+            <a:r>
+              <a:rPr sz="1250" b="0">
+                <a:solidFill>
+                  <a:srgbClr val="4F5560"/>
+                </a:solidFill>
+                <a:latin typeface="Calibri"/>
+              </a:rPr>
+              <a:t>•  Opt out of primary use entirely   Art. 10</a:t>
             </a:r>
           </a:p>
         </p:txBody>
@@ -4482,8 +4578,8 @@
         </p:nvSpPr>
         <p:spPr>
           <a:xfrm>
-            <a:off x="7589520" y="2990088"/>
-            <a:ext cx="4050791" cy="1170432"/>
+            <a:off x="7360920" y="4663440"/>
+            <a:ext cx="4279392" cy="1600200"/>
           </a:xfrm>
           <a:prstGeom prst="roundRect">
             <a:avLst>
@@ -4528,8 +4624,8 @@
         </p:nvSpPr>
         <p:spPr>
           <a:xfrm>
-            <a:off x="7589520" y="2990088"/>
-            <a:ext cx="4050791" cy="384048"/>
+            <a:off x="7360920" y="4663440"/>
+            <a:ext cx="4279392" cy="384048"/>
           </a:xfrm>
           <a:prstGeom prst="rect">
             <a:avLst/>
@@ -4572,8 +4668,8 @@
         </p:nvSpPr>
         <p:spPr>
           <a:xfrm>
-            <a:off x="7790688" y="3063240"/>
-            <a:ext cx="3648456" cy="310896"/>
+            <a:off x="7562088" y="4736592"/>
+            <a:ext cx="3877055" cy="310896"/>
           </a:xfrm>
           <a:prstGeom prst="rect">
             <a:avLst/>
@@ -4592,13 +4688,13 @@
               </a:lnSpc>
             </a:pPr>
             <a:r>
-              <a:rPr sz="1300" b="1">
+              <a:rPr sz="1500" b="1">
                 <a:solidFill>
                   <a:srgbClr val="FFFFFF"/>
                 </a:solidFill>
                 <a:latin typeface="Calibri"/>
               </a:rPr>
-              <a:t>Real protocols, not mock-ups</a:t>
+              <a:t>And it has to actually work</a:t>
             </a:r>
           </a:p>
         </p:txBody>
@@ -4611,8 +4707,8 @@
         </p:nvSpPr>
         <p:spPr>
           <a:xfrm>
-            <a:off x="7790688" y="3557016"/>
-            <a:ext cx="3648456" cy="438912"/>
+            <a:off x="7562088" y="5230368"/>
+            <a:ext cx="3877055" cy="868680"/>
           </a:xfrm>
           <a:prstGeom prst="rect">
             <a:avLst/>
@@ -4631,317 +4727,20 @@
               </a:lnSpc>
             </a:pPr>
             <a:r>
-              <a:rPr sz="1100" b="0">
+              <a:rPr sz="1200" b="0">
                 <a:solidFill>
                   <a:srgbClr val="4F5560"/>
                 </a:solidFill>
                 <a:latin typeface="Calibri"/>
               </a:rPr>
-              <a:t>Dataspace Protocol, HL7 FHIR R4, OMOP CDM, HealthDCAT-AP, OIDC, ODRL policies on every access.</a:t>
-            </a:r>
-          </a:p>
-        </p:txBody>
-      </p:sp>
-      <p:sp>
-        <p:nvSpPr>
-          <p:cNvPr id="15" name="Rounded Rectangle 14"/>
-          <p:cNvSpPr/>
-          <p:nvPr/>
-        </p:nvSpPr>
-        <p:spPr>
-          <a:xfrm>
-            <a:off x="7589520" y="4288536"/>
-            <a:ext cx="4050791" cy="1170432"/>
-          </a:xfrm>
-          <a:prstGeom prst="roundRect">
-            <a:avLst>
-              <a:gd name="adj" fmla="val 5000"/>
-            </a:avLst>
-          </a:prstGeom>
-          <a:solidFill>
-            <a:srgbClr val="F4EFE6"/>
-          </a:solidFill>
-          <a:ln>
-            <a:noFill/>
-          </a:ln>
-          <a:effectLst/>
-        </p:spPr>
-        <p:style>
-          <a:lnRef idx="1">
-            <a:schemeClr val="accent1"/>
-          </a:lnRef>
-          <a:fillRef idx="3">
-            <a:schemeClr val="accent1"/>
-          </a:fillRef>
-          <a:effectRef idx="2">
-            <a:schemeClr val="accent1"/>
-          </a:effectRef>
-          <a:fontRef idx="minor">
-            <a:schemeClr val="lt1"/>
-          </a:fontRef>
-        </p:style>
-        <p:txBody>
-          <a:bodyPr rtlCol="0" anchor="ctr"/>
-          <a:lstStyle/>
-          <a:p>
-            <a:pPr algn="ctr"/>
-          </a:p>
-        </p:txBody>
-      </p:sp>
-      <p:sp>
-        <p:nvSpPr>
-          <p:cNvPr id="16" name="Rectangle 15"/>
-          <p:cNvSpPr/>
-          <p:nvPr/>
-        </p:nvSpPr>
-        <p:spPr>
-          <a:xfrm>
-            <a:off x="7589520" y="4288536"/>
-            <a:ext cx="4050791" cy="384048"/>
-          </a:xfrm>
-          <a:prstGeom prst="rect">
-            <a:avLst/>
-          </a:prstGeom>
-          <a:solidFill>
-            <a:srgbClr val="E6A817"/>
-          </a:solidFill>
-          <a:ln>
-            <a:noFill/>
-          </a:ln>
-          <a:effectLst/>
-        </p:spPr>
-        <p:style>
-          <a:lnRef idx="1">
-            <a:schemeClr val="accent1"/>
-          </a:lnRef>
-          <a:fillRef idx="3">
-            <a:schemeClr val="accent1"/>
-          </a:fillRef>
-          <a:effectRef idx="2">
-            <a:schemeClr val="accent1"/>
-          </a:effectRef>
-          <a:fontRef idx="minor">
-            <a:schemeClr val="lt1"/>
-          </a:fontRef>
-        </p:style>
-        <p:txBody>
-          <a:bodyPr rtlCol="0" anchor="ctr"/>
-          <a:lstStyle/>
-          <a:p>
-            <a:pPr algn="ctr"/>
-          </a:p>
-        </p:txBody>
-      </p:sp>
-      <p:sp>
-        <p:nvSpPr>
-          <p:cNvPr id="17" name="TextBox 16"/>
-          <p:cNvSpPr txBox="1"/>
-          <p:nvPr/>
-        </p:nvSpPr>
-        <p:spPr>
-          <a:xfrm>
-            <a:off x="7790688" y="4361688"/>
-            <a:ext cx="3648456" cy="310896"/>
-          </a:xfrm>
-          <a:prstGeom prst="rect">
-            <a:avLst/>
-          </a:prstGeom>
-          <a:noFill/>
-        </p:spPr>
-        <p:txBody>
-          <a:bodyPr wrap="square" lIns="0" rIns="0" tIns="0" bIns="0">
-            <a:spAutoFit/>
-          </a:bodyPr>
-          <a:lstStyle/>
-          <a:p>
-            <a:pPr>
-              <a:lnSpc>
-                <a:spcPct val="100000"/>
-              </a:lnSpc>
-            </a:pPr>
-            <a:r>
-              <a:rPr sz="1300" b="1">
-                <a:solidFill>
-                  <a:srgbClr val="FFFFFF"/>
-                </a:solidFill>
-                <a:latin typeface="Calibri"/>
-              </a:rPr>
-              <a:t>Two ways to see it</a:t>
-            </a:r>
-          </a:p>
-        </p:txBody>
-      </p:sp>
-      <p:sp>
-        <p:nvSpPr>
-          <p:cNvPr id="18" name="TextBox 17"/>
-          <p:cNvSpPr txBox="1"/>
-          <p:nvPr/>
-        </p:nvSpPr>
-        <p:spPr>
-          <a:xfrm>
-            <a:off x="7790688" y="4855464"/>
-            <a:ext cx="3648456" cy="438912"/>
-          </a:xfrm>
-          <a:prstGeom prst="rect">
-            <a:avLst/>
-          </a:prstGeom>
-          <a:noFill/>
-        </p:spPr>
-        <p:txBody>
-          <a:bodyPr wrap="square" lIns="0" rIns="0" tIns="0" bIns="0">
-            <a:spAutoFit/>
-          </a:bodyPr>
-          <a:lstStyle/>
-          <a:p>
-            <a:pPr>
-              <a:lnSpc>
-                <a:spcPct val="108000"/>
-              </a:lnSpc>
-            </a:pPr>
-            <a:r>
-              <a:rPr sz="1100" b="0">
-                <a:solidFill>
-                  <a:srgbClr val="4F5560"/>
-                </a:solidFill>
-                <a:latin typeface="Calibri"/>
-              </a:rPr>
-              <a:t>Live at ehds.mabu.red with real sign-in and seven personas, or a static mirror that cannot fail on the day.</a:t>
-            </a:r>
-          </a:p>
-        </p:txBody>
-      </p:sp>
-      <p:sp>
-        <p:nvSpPr>
-          <p:cNvPr id="19" name="Rounded Rectangle 18"/>
-          <p:cNvSpPr/>
-          <p:nvPr/>
-        </p:nvSpPr>
-        <p:spPr>
-          <a:xfrm>
-            <a:off x="548640" y="5623560"/>
-            <a:ext cx="11091672" cy="685800"/>
-          </a:xfrm>
-          <a:prstGeom prst="roundRect">
-            <a:avLst>
-              <a:gd name="adj" fmla="val 5000"/>
-            </a:avLst>
-          </a:prstGeom>
-          <a:solidFill>
-            <a:srgbClr val="F4EFE6"/>
-          </a:solidFill>
-          <a:ln>
-            <a:noFill/>
-          </a:ln>
-          <a:effectLst/>
-        </p:spPr>
-        <p:style>
-          <a:lnRef idx="1">
-            <a:schemeClr val="accent1"/>
-          </a:lnRef>
-          <a:fillRef idx="3">
-            <a:schemeClr val="accent1"/>
-          </a:fillRef>
-          <a:effectRef idx="2">
-            <a:schemeClr val="accent1"/>
-          </a:effectRef>
-          <a:fontRef idx="minor">
-            <a:schemeClr val="lt1"/>
-          </a:fontRef>
-        </p:style>
-        <p:txBody>
-          <a:bodyPr rtlCol="0" anchor="ctr"/>
-          <a:lstStyle/>
-          <a:p>
-            <a:pPr algn="ctr"/>
-          </a:p>
-        </p:txBody>
-      </p:sp>
-      <p:sp>
-        <p:nvSpPr>
-          <p:cNvPr id="20" name="Rectangle 19"/>
-          <p:cNvSpPr/>
-          <p:nvPr/>
-        </p:nvSpPr>
-        <p:spPr>
-          <a:xfrm>
-            <a:off x="548640" y="5623560"/>
-            <a:ext cx="164592" cy="685800"/>
-          </a:xfrm>
-          <a:prstGeom prst="rect">
-            <a:avLst/>
-          </a:prstGeom>
-          <a:solidFill>
-            <a:srgbClr val="143D59"/>
-          </a:solidFill>
-          <a:ln>
-            <a:noFill/>
-          </a:ln>
-          <a:effectLst/>
-        </p:spPr>
-        <p:style>
-          <a:lnRef idx="1">
-            <a:schemeClr val="accent1"/>
-          </a:lnRef>
-          <a:fillRef idx="3">
-            <a:schemeClr val="accent1"/>
-          </a:fillRef>
-          <a:effectRef idx="2">
-            <a:schemeClr val="accent1"/>
-          </a:effectRef>
-          <a:fontRef idx="minor">
-            <a:schemeClr val="lt1"/>
-          </a:fontRef>
-        </p:style>
-        <p:txBody>
-          <a:bodyPr rtlCol="0" anchor="ctr"/>
-          <a:lstStyle/>
-          <a:p>
-            <a:pPr algn="ctr"/>
-          </a:p>
-        </p:txBody>
-      </p:sp>
-      <p:sp>
-        <p:nvSpPr>
-          <p:cNvPr id="21" name="TextBox 20"/>
-          <p:cNvSpPr txBox="1"/>
-          <p:nvPr/>
-        </p:nvSpPr>
-        <p:spPr>
-          <a:xfrm>
-            <a:off x="960120" y="5788152"/>
-            <a:ext cx="10424160" cy="429768"/>
-          </a:xfrm>
-          <a:prstGeom prst="rect">
-            <a:avLst/>
-          </a:prstGeom>
-          <a:noFill/>
-        </p:spPr>
-        <p:txBody>
-          <a:bodyPr wrap="square" lIns="0" rIns="0" tIns="0" bIns="0">
-            <a:spAutoFit/>
-          </a:bodyPr>
-          <a:lstStyle/>
-          <a:p>
-            <a:pPr>
-              <a:lnSpc>
-                <a:spcPct val="110000"/>
-              </a:lnSpc>
-            </a:pPr>
-            <a:r>
-              <a:rPr sz="1200" b="0">
-                <a:solidFill>
-                  <a:srgbClr val="4F5560"/>
-                </a:solidFill>
-                <a:latin typeface="Calibri"/>
-              </a:rPr>
-              <a:t>Live: ehds.mabu.red      Mirror: ma3u.github.io/MinimumViableHealthDataspacev2      Two access bodies in the data, so the cross-border permit is a real one.</a:t>
-            </a:r>
-          </a:p>
-        </p:txBody>
-      </p:sp>
-      <p:sp>
-        <p:nvSpPr>
-          <p:cNvPr id="22" name="TextBox 21"/>
+              <a:t>One European exchange format, Art. 15. Identification that holds across a border, Art. 16. A national gateway into MyHealth@EU, Art. 23.</a:t>
+            </a:r>
+          </a:p>
+        </p:txBody>
+      </p:sp>
+      <p:sp>
+        <p:nvSpPr>
+          <p:cNvPr id="15" name="TextBox 14"/>
           <p:cNvSpPr txBox="1"/>
           <p:nvPr/>
         </p:nvSpPr>
@@ -4973,7 +4772,7 @@
                 </a:solidFill>
                 <a:latin typeface="Calibri"/>
               </a:rPr>
-              <a:t>github.com/ma3u/MinimumViableHealthDataspacev2  ·  issue #27</a:t>
+              <a:t>Reg. (EU) 2025/327, Art. 3 to 10, 15, 16, 23</a:t>
             </a:r>
           </a:p>
         </p:txBody>
@@ -5048,8 +4847,8 @@
         </p:nvSpPr>
         <p:spPr>
           <a:xfrm>
-            <a:off x="548640" y="320040"/>
-            <a:ext cx="10972800" cy="640080"/>
+            <a:off x="548640" y="292608"/>
+            <a:ext cx="10972800" cy="502920"/>
           </a:xfrm>
           <a:prstGeom prst="rect">
             <a:avLst/>
@@ -5068,13 +4867,13 @@
               </a:lnSpc>
             </a:pPr>
             <a:r>
-              <a:rPr sz="3000" b="1">
+              <a:rPr sz="2700" b="1">
                 <a:solidFill>
                   <a:srgbClr val="143D59"/>
                 </a:solidFill>
                 <a:latin typeface="Calibri"/>
               </a:rPr>
-              <a:t>A proposed operating model for the EHDS</a:t>
+              <a:t>Already working, on synthetic data</a:t>
             </a:r>
           </a:p>
         </p:txBody>
@@ -5087,8 +4886,8 @@
         </p:nvSpPr>
         <p:spPr>
           <a:xfrm>
-            <a:off x="548640" y="960120"/>
-            <a:ext cx="10972800" cy="411480"/>
+            <a:off x="548640" y="859536"/>
+            <a:ext cx="10972800" cy="365760"/>
           </a:xfrm>
           <a:prstGeom prst="rect">
             <a:avLst/>
@@ -5107,13 +4906,13 @@
               </a:lnSpc>
             </a:pPr>
             <a:r>
-              <a:rPr sz="1600" b="0">
+              <a:rPr sz="1400" b="0">
                 <a:solidFill>
                   <a:srgbClr val="4F5560"/>
                 </a:solidFill>
                 <a:latin typeface="Calibri"/>
               </a:rPr>
-              <a:t>The Catena-X operating model, re-cut for Regulation (EU) 2025/327.</a:t>
+              <a:t>The demonstrator's own patient view, and the six data categories Chapter II turns on.</a:t>
             </a:r>
           </a:p>
         </p:txBody>
@@ -5159,7 +4958,7 @@
       </p:sp>
       <p:pic>
         <p:nvPicPr>
-          <p:cNvPr id="6" name="Picture 5" descr="ehds-operating-model.png"/>
+          <p:cNvPr id="6" name="Picture 5" descr="image.png"/>
           <p:cNvPicPr>
             <a:picLocks noChangeAspect="1"/>
           </p:cNvPicPr>
@@ -5173,8 +4972,8 @@
         </p:blipFill>
         <p:spPr>
           <a:xfrm>
-            <a:off x="502920" y="1645920"/>
-            <a:ext cx="6108192" cy="4663440"/>
+            <a:off x="548640" y="1325880"/>
+            <a:ext cx="3922776" cy="4937760"/>
           </a:xfrm>
           <a:prstGeom prst="rect">
             <a:avLst/>
@@ -5189,8 +4988,8 @@
         </p:nvSpPr>
         <p:spPr>
           <a:xfrm>
-            <a:off x="6858000" y="1645920"/>
-            <a:ext cx="4754880" cy="1463040"/>
+            <a:off x="4754880" y="1325880"/>
+            <a:ext cx="6885432" cy="2651760"/>
           </a:xfrm>
           <a:prstGeom prst="roundRect">
             <a:avLst>
@@ -5235,8 +5034,8 @@
         </p:nvSpPr>
         <p:spPr>
           <a:xfrm>
-            <a:off x="6858000" y="1645920"/>
-            <a:ext cx="4754880" cy="384048"/>
+            <a:off x="4754880" y="1325880"/>
+            <a:ext cx="6885432" cy="384048"/>
           </a:xfrm>
           <a:prstGeom prst="rect">
             <a:avLst/>
@@ -5279,8 +5078,8 @@
         </p:nvSpPr>
         <p:spPr>
           <a:xfrm>
-            <a:off x="7059168" y="1719072"/>
-            <a:ext cx="4352544" cy="310896"/>
+            <a:off x="4956048" y="1399032"/>
+            <a:ext cx="6483096" cy="310896"/>
           </a:xfrm>
           <a:prstGeom prst="rect">
             <a:avLst/>
@@ -5299,13 +5098,13 @@
               </a:lnSpc>
             </a:pPr>
             <a:r>
-              <a:rPr sz="1500" b="1">
+              <a:rPr sz="1600" b="1">
                 <a:solidFill>
                   <a:srgbClr val="FFFFFF"/>
                 </a:solidFill>
                 <a:latin typeface="Calibri"/>
               </a:rPr>
-              <a:t>Closed by law</a:t>
+              <a:t>The six priority categories, and when they must be live</a:t>
             </a:r>
           </a:p>
         </p:txBody>
@@ -5318,8 +5117,8 @@
         </p:nvSpPr>
         <p:spPr>
           <a:xfrm>
-            <a:off x="7059168" y="2212848"/>
-            <a:ext cx="4352544" cy="731520"/>
+            <a:off x="4956048" y="1892807"/>
+            <a:ext cx="6483096" cy="1920239"/>
           </a:xfrm>
           <a:prstGeom prst="rect">
             <a:avLst/>
@@ -5338,13 +5137,120 @@
               </a:lnSpc>
             </a:pPr>
             <a:r>
-              <a:rPr sz="1200" b="0">
-                <a:solidFill>
-                  <a:srgbClr val="4F5560"/>
+              <a:rPr sz="1300" b="1">
+                <a:solidFill>
+                  <a:srgbClr val="143D59"/>
                 </a:solidFill>
                 <a:latin typeface="Calibri"/>
               </a:rPr>
-              <a:t>The Union layer is the Commission's: the federated EU catalogue, cross-border routing, compliance checks, a central environment. Art. 96.</a:t>
+              <a:t>2029    </a:t>
+            </a:r>
+            <a:r>
+              <a:rPr sz="1300" b="0">
+                <a:solidFill>
+                  <a:srgbClr val="4F5560"/>
+                </a:solidFill>
+                <a:latin typeface="Calibri"/>
+              </a:rPr>
+              <a:t>Patient summaries · electronic prescriptions · electronic dispensations</a:t>
+            </a:r>
+          </a:p>
+          <a:p>
+            <a:pPr>
+              <a:lnSpc>
+                <a:spcPct val="108000"/>
+              </a:lnSpc>
+            </a:pPr>
+            <a:r>
+              <a:rPr sz="1300" b="0">
+                <a:solidFill>
+                  <a:srgbClr val="4F5560"/>
+                </a:solidFill>
+                <a:latin typeface="Calibri"/>
+              </a:rPr>
+              <a:t/>
+            </a:r>
+          </a:p>
+          <a:p>
+            <a:pPr>
+              <a:lnSpc>
+                <a:spcPct val="108000"/>
+              </a:lnSpc>
+            </a:pPr>
+            <a:r>
+              <a:rPr sz="1300" b="1">
+                <a:solidFill>
+                  <a:srgbClr val="143D59"/>
+                </a:solidFill>
+                <a:latin typeface="Calibri"/>
+              </a:rPr>
+              <a:t>2031    </a:t>
+            </a:r>
+            <a:r>
+              <a:rPr sz="1300" b="0">
+                <a:solidFill>
+                  <a:srgbClr val="4F5560"/>
+                </a:solidFill>
+                <a:latin typeface="Calibri"/>
+              </a:rPr>
+              <a:t>Medical imaging and reports · test results including laboratory ·</a:t>
+            </a:r>
+          </a:p>
+          <a:p>
+            <a:pPr>
+              <a:lnSpc>
+                <a:spcPct val="108000"/>
+              </a:lnSpc>
+            </a:pPr>
+            <a:r>
+              <a:rPr sz="1300" b="1">
+                <a:solidFill>
+                  <a:srgbClr val="143D59"/>
+                </a:solidFill>
+                <a:latin typeface="Calibri"/>
+              </a:rPr>
+              <a:t>              </a:t>
+            </a:r>
+            <a:r>
+              <a:rPr sz="1300" b="0">
+                <a:solidFill>
+                  <a:srgbClr val="4F5560"/>
+                </a:solidFill>
+                <a:latin typeface="Calibri"/>
+              </a:rPr>
+              <a:t>discharge reports</a:t>
+            </a:r>
+          </a:p>
+          <a:p>
+            <a:pPr>
+              <a:lnSpc>
+                <a:spcPct val="108000"/>
+              </a:lnSpc>
+            </a:pPr>
+            <a:r>
+              <a:rPr sz="1300" b="0">
+                <a:solidFill>
+                  <a:srgbClr val="4F5560"/>
+                </a:solidFill>
+                <a:latin typeface="Calibri"/>
+              </a:rPr>
+              <a:t/>
+            </a:r>
+          </a:p>
+          <a:p>
+            <a:pPr>
+              <a:lnSpc>
+                <a:spcPct val="108000"/>
+              </a:lnSpc>
+            </a:pPr>
+            <a:r>
+              <a:rPr sz="1300" b="0">
+                <a:solidFill>
+                  <a:srgbClr val="4F5560"/>
+                </a:solidFill>
+                <a:latin typeface="Calibri"/>
+              </a:rPr>
+              <a:t>Art. 14(1) and Annex I. Every right on the previous slide attaches to these six.</a:t>
             </a:r>
           </a:p>
         </p:txBody>
@@ -5357,8 +5263,8 @@
         </p:nvSpPr>
         <p:spPr>
           <a:xfrm>
-            <a:off x="6858000" y="3273552"/>
-            <a:ext cx="4754880" cy="1463040"/>
+            <a:off x="4754880" y="4160520"/>
+            <a:ext cx="6885432" cy="2103120"/>
           </a:xfrm>
           <a:prstGeom prst="roundRect">
             <a:avLst>
@@ -5403,8 +5309,8 @@
         </p:nvSpPr>
         <p:spPr>
           <a:xfrm>
-            <a:off x="6858000" y="3273552"/>
-            <a:ext cx="4754880" cy="384048"/>
+            <a:off x="4754880" y="4160520"/>
+            <a:ext cx="6885432" cy="384048"/>
           </a:xfrm>
           <a:prstGeom prst="rect">
             <a:avLst/>
@@ -5447,8 +5353,8 @@
         </p:nvSpPr>
         <p:spPr>
           <a:xfrm>
-            <a:off x="7059168" y="3346704"/>
-            <a:ext cx="4352544" cy="310896"/>
+            <a:off x="4956048" y="4233672"/>
+            <a:ext cx="6483096" cy="310896"/>
           </a:xfrm>
           <a:prstGeom prst="rect">
             <a:avLst/>
@@ -5467,13 +5373,13 @@
               </a:lnSpc>
             </a:pPr>
             <a:r>
-              <a:rPr sz="1500" b="1">
+              <a:rPr sz="1600" b="1">
                 <a:solidFill>
                   <a:srgbClr val="FFFFFF"/>
                 </a:solidFill>
                 <a:latin typeface="Calibri"/>
               </a:rPr>
-              <a:t>Open by design</a:t>
+              <a:t>What you are looking at</a:t>
             </a:r>
           </a:p>
         </p:txBody>
@@ -5486,8 +5392,8 @@
         </p:nvSpPr>
         <p:spPr>
           <a:xfrm>
-            <a:off x="7059168" y="3840480"/>
-            <a:ext cx="4352544" cy="731520"/>
+            <a:off x="4956048" y="4727448"/>
+            <a:ext cx="6483096" cy="1371599"/>
           </a:xfrm>
           <a:prstGeom prst="rect">
             <a:avLst/>
@@ -5512,161 +5418,9 @@
                 </a:solidFill>
                 <a:latin typeface="Calibri"/>
               </a:rPr>
-              <a:t>Below the access body nothing is specified. That is where an operating company sits, as processor under Art. 28 GDPR.</a:t>
-            </a:r>
-          </a:p>
-        </p:txBody>
-      </p:sp>
-      <p:sp>
-        <p:nvSpPr>
-          <p:cNvPr id="15" name="Rounded Rectangle 14"/>
-          <p:cNvSpPr/>
-          <p:nvPr/>
-        </p:nvSpPr>
-        <p:spPr>
-          <a:xfrm>
-            <a:off x="6858000" y="4901184"/>
-            <a:ext cx="4754880" cy="1463040"/>
-          </a:xfrm>
-          <a:prstGeom prst="roundRect">
-            <a:avLst>
-              <a:gd name="adj" fmla="val 5000"/>
-            </a:avLst>
-          </a:prstGeom>
-          <a:solidFill>
-            <a:srgbClr val="F4EFE6"/>
-          </a:solidFill>
-          <a:ln>
-            <a:noFill/>
-          </a:ln>
-          <a:effectLst/>
-        </p:spPr>
-        <p:style>
-          <a:lnRef idx="1">
-            <a:schemeClr val="accent1"/>
-          </a:lnRef>
-          <a:fillRef idx="3">
-            <a:schemeClr val="accent1"/>
-          </a:fillRef>
-          <a:effectRef idx="2">
-            <a:schemeClr val="accent1"/>
-          </a:effectRef>
-          <a:fontRef idx="minor">
-            <a:schemeClr val="lt1"/>
-          </a:fontRef>
-        </p:style>
-        <p:txBody>
-          <a:bodyPr rtlCol="0" anchor="ctr"/>
-          <a:lstStyle/>
-          <a:p>
-            <a:pPr algn="ctr"/>
-          </a:p>
-        </p:txBody>
-      </p:sp>
-      <p:sp>
-        <p:nvSpPr>
-          <p:cNvPr id="16" name="Rectangle 15"/>
-          <p:cNvSpPr/>
-          <p:nvPr/>
-        </p:nvSpPr>
-        <p:spPr>
-          <a:xfrm>
-            <a:off x="6858000" y="4901184"/>
-            <a:ext cx="4754880" cy="384048"/>
-          </a:xfrm>
-          <a:prstGeom prst="rect">
-            <a:avLst/>
-          </a:prstGeom>
-          <a:solidFill>
-            <a:srgbClr val="E6A817"/>
-          </a:solidFill>
-          <a:ln>
-            <a:noFill/>
-          </a:ln>
-          <a:effectLst/>
-        </p:spPr>
-        <p:style>
-          <a:lnRef idx="1">
-            <a:schemeClr val="accent1"/>
-          </a:lnRef>
-          <a:fillRef idx="3">
-            <a:schemeClr val="accent1"/>
-          </a:fillRef>
-          <a:effectRef idx="2">
-            <a:schemeClr val="accent1"/>
-          </a:effectRef>
-          <a:fontRef idx="minor">
-            <a:schemeClr val="lt1"/>
-          </a:fontRef>
-        </p:style>
-        <p:txBody>
-          <a:bodyPr rtlCol="0" anchor="ctr"/>
-          <a:lstStyle/>
-          <a:p>
-            <a:pPr algn="ctr"/>
-          </a:p>
-        </p:txBody>
-      </p:sp>
-      <p:sp>
-        <p:nvSpPr>
-          <p:cNvPr id="17" name="TextBox 16"/>
-          <p:cNvSpPr txBox="1"/>
-          <p:nvPr/>
-        </p:nvSpPr>
-        <p:spPr>
-          <a:xfrm>
-            <a:off x="7059168" y="4974336"/>
-            <a:ext cx="4352544" cy="310896"/>
-          </a:xfrm>
-          <a:prstGeom prst="rect">
-            <a:avLst/>
-          </a:prstGeom>
-          <a:noFill/>
-        </p:spPr>
-        <p:txBody>
-          <a:bodyPr wrap="square" lIns="0" rIns="0" tIns="0" bIns="0">
-            <a:spAutoFit/>
-          </a:bodyPr>
-          <a:lstStyle/>
-          <a:p>
-            <a:pPr>
-              <a:lnSpc>
-                <a:spcPct val="100000"/>
-              </a:lnSpc>
-            </a:pPr>
-            <a:r>
-              <a:rPr sz="1500" b="1">
-                <a:solidFill>
-                  <a:srgbClr val="FFFFFF"/>
-                </a:solidFill>
-                <a:latin typeface="Calibri"/>
-              </a:rPr>
-              <a:t>Never delegated</a:t>
-            </a:r>
-          </a:p>
-        </p:txBody>
-      </p:sp>
-      <p:sp>
-        <p:nvSpPr>
-          <p:cNvPr id="18" name="TextBox 17"/>
-          <p:cNvSpPr txBox="1"/>
-          <p:nvPr/>
-        </p:nvSpPr>
-        <p:spPr>
-          <a:xfrm>
-            <a:off x="7059168" y="5468112"/>
-            <a:ext cx="4352544" cy="731520"/>
-          </a:xfrm>
-          <a:prstGeom prst="rect">
-            <a:avLst/>
-          </a:prstGeom>
-          <a:noFill/>
-        </p:spPr>
-        <p:txBody>
-          <a:bodyPr wrap="square" lIns="0" rIns="0" tIns="0" bIns="0">
-            <a:spAutoFit/>
-          </a:bodyPr>
-          <a:lstStyle/>
+              <a:t>The patient view of the demonstrator. The page labels itself EHDS Art. 3 and GDPR Art. 15, shows HL7 FHIR R4 events mapped to OMOP concepts on one clinical timeline, and logs every access.</a:t>
+            </a:r>
+          </a:p>
           <a:p>
             <a:pPr>
               <a:lnSpc>
@@ -5680,14 +5434,30 @@
                 </a:solidFill>
                 <a:latin typeface="Calibri"/>
               </a:rPr>
-              <a:t>Issuing a permit, enforcement and fees stay with the access body. Art. 68, 63, 62. Its own duty to segregate functions, Art. 55(3), is what makes room for an operator.</a:t>
-            </a:r>
-          </a:p>
-        </p:txBody>
-      </p:sp>
-      <p:sp>
-        <p:nvSpPr>
-          <p:cNvPr id="19" name="TextBox 18"/>
+              <a:t/>
+            </a:r>
+          </a:p>
+          <a:p>
+            <a:pPr>
+              <a:lnSpc>
+                <a:spcPct val="108000"/>
+              </a:lnSpc>
+            </a:pPr>
+            <a:r>
+              <a:rPr sz="1200" b="0">
+                <a:solidFill>
+                  <a:srgbClr val="4F5560"/>
+                </a:solidFill>
+                <a:latin typeface="Calibri"/>
+              </a:rPr>
+              <a:t>Live at ehds.mabu.red with real sign-in, or on the static mirror that cannot fail on the day.</a:t>
+            </a:r>
+          </a:p>
+        </p:txBody>
+      </p:sp>
+      <p:sp>
+        <p:nvSpPr>
+          <p:cNvPr id="15" name="TextBox 14"/>
           <p:cNvSpPr txBox="1"/>
           <p:nvPr/>
         </p:nvSpPr>
@@ -5719,7 +5489,7 @@
                 </a:solidFill>
                 <a:latin typeface="Calibri"/>
               </a:rPr>
-              <a:t>catenax-ev.github.io/docs/operating-model  ·  data.europa.eu/eli/reg/2025/327/oj  ·  cofinity-x.com</a:t>
+              <a:t>Reg. (EU) 2025/327, Art. 14(1), Annex I, Art. 105  ·  github.com/ma3u/MinimumViableHealthDataspacev2</a:t>
             </a:r>
           </a:p>
         </p:txBody>
@@ -5794,8 +5564,8 @@
         </p:nvSpPr>
         <p:spPr>
           <a:xfrm>
-            <a:off x="548640" y="320040"/>
-            <a:ext cx="10972800" cy="640080"/>
+            <a:off x="548640" y="292608"/>
+            <a:ext cx="10972800" cy="502920"/>
           </a:xfrm>
           <a:prstGeom prst="rect">
             <a:avLst/>
@@ -5814,13 +5584,13 @@
               </a:lnSpc>
             </a:pPr>
             <a:r>
-              <a:rPr sz="3000" b="1">
+              <a:rPr sz="2700" b="1">
                 <a:solidFill>
                   <a:srgbClr val="143D59"/>
                 </a:solidFill>
                 <a:latin typeface="Calibri"/>
               </a:rPr>
-              <a:t>What running it takes, and by when</a:t>
+              <a:t>A proposed operating model for primary use</a:t>
             </a:r>
           </a:p>
         </p:txBody>
@@ -5833,8 +5603,8 @@
         </p:nvSpPr>
         <p:spPr>
           <a:xfrm>
-            <a:off x="548640" y="960120"/>
-            <a:ext cx="10972800" cy="411480"/>
+            <a:off x="548640" y="859536"/>
+            <a:ext cx="10972800" cy="365760"/>
           </a:xfrm>
           <a:prstGeom prst="rect">
             <a:avLst/>
@@ -5853,13 +5623,13 @@
               </a:lnSpc>
             </a:pPr>
             <a:r>
-              <a:rPr sz="1600" b="0">
+              <a:rPr sz="1400" b="0">
                 <a:solidFill>
                   <a:srgbClr val="4F5560"/>
                 </a:solidFill>
                 <a:latin typeface="Calibri"/>
               </a:rPr>
-              <a:t>Five functions, and four dates that nobody in this room gets to choose.</a:t>
+              <a:t>Chapter II cut the way Catena-X cuts a dataspace. Two of the three layers are already law.</a:t>
             </a:r>
           </a:p>
         </p:txBody>
@@ -5903,1775 +5673,33 @@
           </a:p>
         </p:txBody>
       </p:sp>
-      <p:sp>
-        <p:nvSpPr>
-          <p:cNvPr id="6" name="Rounded Rectangle 5"/>
-          <p:cNvSpPr/>
-          <p:nvPr/>
-        </p:nvSpPr>
-        <p:spPr>
-          <a:xfrm>
-            <a:off x="548640" y="1645920"/>
-            <a:ext cx="2103120" cy="3246120"/>
-          </a:xfrm>
-          <a:prstGeom prst="roundRect">
-            <a:avLst>
-              <a:gd name="adj" fmla="val 5000"/>
-            </a:avLst>
-          </a:prstGeom>
-          <a:solidFill>
-            <a:srgbClr val="F4EFE6"/>
-          </a:solidFill>
-          <a:ln>
-            <a:noFill/>
-          </a:ln>
-          <a:effectLst/>
-        </p:spPr>
-        <p:style>
-          <a:lnRef idx="1">
-            <a:schemeClr val="accent1"/>
-          </a:lnRef>
-          <a:fillRef idx="3">
-            <a:schemeClr val="accent1"/>
-          </a:fillRef>
-          <a:effectRef idx="2">
-            <a:schemeClr val="accent1"/>
-          </a:effectRef>
-          <a:fontRef idx="minor">
-            <a:schemeClr val="lt1"/>
-          </a:fontRef>
-        </p:style>
-        <p:txBody>
-          <a:bodyPr rtlCol="0" anchor="ctr"/>
-          <a:lstStyle/>
-          <a:p>
-            <a:pPr algn="ctr"/>
-          </a:p>
-        </p:txBody>
-      </p:sp>
-      <p:sp>
-        <p:nvSpPr>
-          <p:cNvPr id="7" name="Rectangle 6"/>
-          <p:cNvSpPr/>
-          <p:nvPr/>
-        </p:nvSpPr>
-        <p:spPr>
-          <a:xfrm>
-            <a:off x="548640" y="1645920"/>
-            <a:ext cx="2103120" cy="384048"/>
-          </a:xfrm>
-          <a:prstGeom prst="rect">
-            <a:avLst/>
-          </a:prstGeom>
-          <a:solidFill>
-            <a:srgbClr val="143D59"/>
-          </a:solidFill>
-          <a:ln>
-            <a:noFill/>
-          </a:ln>
-          <a:effectLst/>
-        </p:spPr>
-        <p:style>
-          <a:lnRef idx="1">
-            <a:schemeClr val="accent1"/>
-          </a:lnRef>
-          <a:fillRef idx="3">
-            <a:schemeClr val="accent1"/>
-          </a:fillRef>
-          <a:effectRef idx="2">
-            <a:schemeClr val="accent1"/>
-          </a:effectRef>
-          <a:fontRef idx="minor">
-            <a:schemeClr val="lt1"/>
-          </a:fontRef>
-        </p:style>
-        <p:txBody>
-          <a:bodyPr rtlCol="0" anchor="ctr"/>
-          <a:lstStyle/>
-          <a:p>
-            <a:pPr algn="ctr"/>
-          </a:p>
-        </p:txBody>
-      </p:sp>
-      <p:sp>
-        <p:nvSpPr>
-          <p:cNvPr id="8" name="TextBox 7"/>
-          <p:cNvSpPr txBox="1"/>
-          <p:nvPr/>
-        </p:nvSpPr>
-        <p:spPr>
-          <a:xfrm>
-            <a:off x="749808" y="1719072"/>
-            <a:ext cx="1700784" cy="310896"/>
-          </a:xfrm>
-          <a:prstGeom prst="rect">
-            <a:avLst/>
-          </a:prstGeom>
-          <a:noFill/>
-        </p:spPr>
-        <p:txBody>
-          <a:bodyPr wrap="square" lIns="0" rIns="0" tIns="0" bIns="0">
-            <a:spAutoFit/>
-          </a:bodyPr>
-          <a:lstStyle/>
-          <a:p>
-            <a:pPr>
-              <a:lnSpc>
-                <a:spcPct val="100000"/>
-              </a:lnSpc>
-            </a:pPr>
-            <a:r>
-              <a:rPr sz="1400" b="1">
-                <a:solidFill>
-                  <a:srgbClr val="FFFFFF"/>
-                </a:solidFill>
-                <a:latin typeface="Calibri"/>
-              </a:rPr>
-              <a:t>Planning</a:t>
-            </a:r>
-          </a:p>
-        </p:txBody>
-      </p:sp>
-      <p:sp>
-        <p:nvSpPr>
-          <p:cNvPr id="9" name="TextBox 8"/>
-          <p:cNvSpPr txBox="1"/>
-          <p:nvPr/>
-        </p:nvSpPr>
-        <p:spPr>
-          <a:xfrm>
-            <a:off x="749808" y="2212848"/>
-            <a:ext cx="1700784" cy="2514600"/>
-          </a:xfrm>
-          <a:prstGeom prst="rect">
-            <a:avLst/>
-          </a:prstGeom>
-          <a:noFill/>
-        </p:spPr>
-        <p:txBody>
-          <a:bodyPr wrap="square" lIns="0" rIns="0" tIns="0" bIns="0">
-            <a:spAutoFit/>
-          </a:bodyPr>
-          <a:lstStyle/>
-          <a:p>
-            <a:pPr>
-              <a:lnSpc>
-                <a:spcPct val="108000"/>
-              </a:lnSpc>
-            </a:pPr>
-            <a:r>
-              <a:rPr sz="1100" b="0">
-                <a:solidFill>
-                  <a:srgbClr val="4F5560"/>
-                </a:solidFill>
-                <a:latin typeface="Calibri"/>
-              </a:rPr>
-              <a:t>A release train against the statutory dates.</a:t>
-            </a:r>
-          </a:p>
-          <a:p>
-            <a:pPr>
-              <a:lnSpc>
-                <a:spcPct val="108000"/>
-              </a:lnSpc>
-            </a:pPr>
-            <a:r>
-              <a:rPr sz="1100" b="0">
-                <a:solidFill>
-                  <a:srgbClr val="4F5560"/>
-                </a:solidFill>
-                <a:latin typeface="Calibri"/>
-              </a:rPr>
-              <a:t/>
-            </a:r>
-          </a:p>
-          <a:p>
-            <a:pPr>
-              <a:lnSpc>
-                <a:spcPct val="108000"/>
-              </a:lnSpc>
-            </a:pPr>
-            <a:r>
-              <a:rPr sz="1100" b="0">
-                <a:solidFill>
-                  <a:srgbClr val="4F5560"/>
-                </a:solidFill>
-                <a:latin typeface="Calibri"/>
-              </a:rPr>
-              <a:t>Two supported versions, a sandbox with synthetic data.</a:t>
-            </a:r>
-          </a:p>
-          <a:p>
-            <a:pPr>
-              <a:lnSpc>
-                <a:spcPct val="108000"/>
-              </a:lnSpc>
-            </a:pPr>
-            <a:r>
-              <a:rPr sz="1100" b="0">
-                <a:solidFill>
-                  <a:srgbClr val="4F5560"/>
-                </a:solidFill>
-                <a:latin typeface="Calibri"/>
-              </a:rPr>
-              <a:t/>
-            </a:r>
-          </a:p>
-          <a:p>
-            <a:pPr>
-              <a:lnSpc>
-                <a:spcPct val="108000"/>
-              </a:lnSpc>
-            </a:pPr>
-            <a:r>
-              <a:rPr sz="1100" b="0">
-                <a:solidFill>
-                  <a:srgbClr val="4F5560"/>
-                </a:solidFill>
-                <a:latin typeface="Calibri"/>
-              </a:rPr>
-              <a:t>Art. 105</a:t>
-            </a:r>
-          </a:p>
-        </p:txBody>
-      </p:sp>
-      <p:sp>
-        <p:nvSpPr>
-          <p:cNvPr id="10" name="Rounded Rectangle 9"/>
-          <p:cNvSpPr/>
-          <p:nvPr/>
-        </p:nvSpPr>
-        <p:spPr>
-          <a:xfrm>
-            <a:off x="2794406" y="1645920"/>
-            <a:ext cx="2103120" cy="3246120"/>
-          </a:xfrm>
-          <a:prstGeom prst="roundRect">
-            <a:avLst>
-              <a:gd name="adj" fmla="val 5000"/>
-            </a:avLst>
-          </a:prstGeom>
-          <a:solidFill>
-            <a:srgbClr val="F4EFE6"/>
-          </a:solidFill>
-          <a:ln>
-            <a:noFill/>
-          </a:ln>
-          <a:effectLst/>
-        </p:spPr>
-        <p:style>
-          <a:lnRef idx="1">
-            <a:schemeClr val="accent1"/>
-          </a:lnRef>
-          <a:fillRef idx="3">
-            <a:schemeClr val="accent1"/>
-          </a:fillRef>
-          <a:effectRef idx="2">
-            <a:schemeClr val="accent1"/>
-          </a:effectRef>
-          <a:fontRef idx="minor">
-            <a:schemeClr val="lt1"/>
-          </a:fontRef>
-        </p:style>
-        <p:txBody>
-          <a:bodyPr rtlCol="0" anchor="ctr"/>
-          <a:lstStyle/>
-          <a:p>
-            <a:pPr algn="ctr"/>
-          </a:p>
-        </p:txBody>
-      </p:sp>
-      <p:sp>
-        <p:nvSpPr>
-          <p:cNvPr id="11" name="Rectangle 10"/>
-          <p:cNvSpPr/>
-          <p:nvPr/>
-        </p:nvSpPr>
-        <p:spPr>
-          <a:xfrm>
-            <a:off x="2794406" y="1645920"/>
-            <a:ext cx="2103120" cy="384048"/>
-          </a:xfrm>
-          <a:prstGeom prst="rect">
-            <a:avLst/>
-          </a:prstGeom>
-          <a:solidFill>
-            <a:srgbClr val="2A9D8F"/>
-          </a:solidFill>
-          <a:ln>
-            <a:noFill/>
-          </a:ln>
-          <a:effectLst/>
-        </p:spPr>
-        <p:style>
-          <a:lnRef idx="1">
-            <a:schemeClr val="accent1"/>
-          </a:lnRef>
-          <a:fillRef idx="3">
-            <a:schemeClr val="accent1"/>
-          </a:fillRef>
-          <a:effectRef idx="2">
-            <a:schemeClr val="accent1"/>
-          </a:effectRef>
-          <a:fontRef idx="minor">
-            <a:schemeClr val="lt1"/>
-          </a:fontRef>
-        </p:style>
-        <p:txBody>
-          <a:bodyPr rtlCol="0" anchor="ctr"/>
-          <a:lstStyle/>
-          <a:p>
-            <a:pPr algn="ctr"/>
-          </a:p>
-        </p:txBody>
-      </p:sp>
-      <p:sp>
-        <p:nvSpPr>
-          <p:cNvPr id="12" name="TextBox 11"/>
-          <p:cNvSpPr txBox="1"/>
-          <p:nvPr/>
-        </p:nvSpPr>
-        <p:spPr>
-          <a:xfrm>
-            <a:off x="2995574" y="1719072"/>
-            <a:ext cx="1700784" cy="310896"/>
-          </a:xfrm>
-          <a:prstGeom prst="rect">
-            <a:avLst/>
-          </a:prstGeom>
-          <a:noFill/>
-        </p:spPr>
-        <p:txBody>
-          <a:bodyPr wrap="square" lIns="0" rIns="0" tIns="0" bIns="0">
-            <a:spAutoFit/>
-          </a:bodyPr>
-          <a:lstStyle/>
-          <a:p>
-            <a:pPr>
-              <a:lnSpc>
-                <a:spcPct val="100000"/>
-              </a:lnSpc>
-            </a:pPr>
-            <a:r>
-              <a:rPr sz="1400" b="1">
-                <a:solidFill>
-                  <a:srgbClr val="FFFFFF"/>
-                </a:solidFill>
-                <a:latin typeface="Calibri"/>
-              </a:rPr>
-              <a:t>Data holders</a:t>
-            </a:r>
-          </a:p>
-        </p:txBody>
-      </p:sp>
-      <p:sp>
-        <p:nvSpPr>
-          <p:cNvPr id="13" name="TextBox 12"/>
-          <p:cNvSpPr txBox="1"/>
-          <p:nvPr/>
-        </p:nvSpPr>
-        <p:spPr>
-          <a:xfrm>
-            <a:off x="2995574" y="2212848"/>
-            <a:ext cx="1700784" cy="2514600"/>
-          </a:xfrm>
-          <a:prstGeom prst="rect">
-            <a:avLst/>
-          </a:prstGeom>
-          <a:noFill/>
-        </p:spPr>
-        <p:txBody>
-          <a:bodyPr wrap="square" lIns="0" rIns="0" tIns="0" bIns="0">
-            <a:spAutoFit/>
-          </a:bodyPr>
-          <a:lstStyle/>
-          <a:p>
-            <a:pPr>
-              <a:lnSpc>
-                <a:spcPct val="108000"/>
-              </a:lnSpc>
-            </a:pPr>
-            <a:r>
-              <a:rPr sz="1100" b="0">
-                <a:solidFill>
-                  <a:srgbClr val="4F5560"/>
-                </a:solidFill>
-                <a:latin typeface="Calibri"/>
-              </a:rPr>
-              <a:t>Identify, register, validate, contract, connect, describe, label, sustain.</a:t>
-            </a:r>
-          </a:p>
-          <a:p>
-            <a:pPr>
-              <a:lnSpc>
-                <a:spcPct val="108000"/>
-              </a:lnSpc>
-            </a:pPr>
-            <a:r>
-              <a:rPr sz="1100" b="0">
-                <a:solidFill>
-                  <a:srgbClr val="4F5560"/>
-                </a:solidFill>
-                <a:latin typeface="Calibri"/>
-              </a:rPr>
-              <a:t/>
-            </a:r>
-          </a:p>
-          <a:p>
-            <a:pPr>
-              <a:lnSpc>
-                <a:spcPct val="108000"/>
-              </a:lnSpc>
-            </a:pPr>
-            <a:r>
-              <a:rPr sz="1100" b="0">
-                <a:solidFill>
-                  <a:srgbClr val="4F5560"/>
-                </a:solidFill>
-                <a:latin typeface="Calibri"/>
-              </a:rPr>
-              <a:t>The last two are the ones ministries underestimate.</a:t>
-            </a:r>
-          </a:p>
-          <a:p>
-            <a:pPr>
-              <a:lnSpc>
-                <a:spcPct val="108000"/>
-              </a:lnSpc>
-            </a:pPr>
-            <a:r>
-              <a:rPr sz="1100" b="0">
-                <a:solidFill>
-                  <a:srgbClr val="4F5560"/>
-                </a:solidFill>
-                <a:latin typeface="Calibri"/>
-              </a:rPr>
-              <a:t/>
-            </a:r>
-          </a:p>
-          <a:p>
-            <a:pPr>
-              <a:lnSpc>
-                <a:spcPct val="108000"/>
-              </a:lnSpc>
-            </a:pPr>
-            <a:r>
-              <a:rPr sz="1100" b="0">
-                <a:solidFill>
-                  <a:srgbClr val="4F5560"/>
-                </a:solidFill>
-                <a:latin typeface="Calibri"/>
-              </a:rPr>
-              <a:t>Art. 60, 77, 78</a:t>
-            </a:r>
-          </a:p>
-        </p:txBody>
-      </p:sp>
-      <p:sp>
-        <p:nvSpPr>
-          <p:cNvPr id="14" name="Rounded Rectangle 13"/>
-          <p:cNvSpPr/>
-          <p:nvPr/>
-        </p:nvSpPr>
-        <p:spPr>
-          <a:xfrm>
-            <a:off x="5040172" y="1645920"/>
-            <a:ext cx="2103120" cy="3246120"/>
-          </a:xfrm>
-          <a:prstGeom prst="roundRect">
-            <a:avLst>
-              <a:gd name="adj" fmla="val 5000"/>
-            </a:avLst>
-          </a:prstGeom>
-          <a:solidFill>
-            <a:srgbClr val="F4EFE6"/>
-          </a:solidFill>
-          <a:ln>
-            <a:noFill/>
-          </a:ln>
-          <a:effectLst/>
-        </p:spPr>
-        <p:style>
-          <a:lnRef idx="1">
-            <a:schemeClr val="accent1"/>
-          </a:lnRef>
-          <a:fillRef idx="3">
-            <a:schemeClr val="accent1"/>
-          </a:fillRef>
-          <a:effectRef idx="2">
-            <a:schemeClr val="accent1"/>
-          </a:effectRef>
-          <a:fontRef idx="minor">
-            <a:schemeClr val="lt1"/>
-          </a:fontRef>
-        </p:style>
-        <p:txBody>
-          <a:bodyPr rtlCol="0" anchor="ctr"/>
-          <a:lstStyle/>
-          <a:p>
-            <a:pPr algn="ctr"/>
-          </a:p>
-        </p:txBody>
-      </p:sp>
-      <p:sp>
-        <p:nvSpPr>
-          <p:cNvPr id="15" name="Rectangle 14"/>
-          <p:cNvSpPr/>
-          <p:nvPr/>
-        </p:nvSpPr>
-        <p:spPr>
-          <a:xfrm>
-            <a:off x="5040172" y="1645920"/>
-            <a:ext cx="2103120" cy="384048"/>
-          </a:xfrm>
-          <a:prstGeom prst="rect">
-            <a:avLst/>
-          </a:prstGeom>
-          <a:solidFill>
-            <a:srgbClr val="528B55"/>
-          </a:solidFill>
-          <a:ln>
-            <a:noFill/>
-          </a:ln>
-          <a:effectLst/>
-        </p:spPr>
-        <p:style>
-          <a:lnRef idx="1">
-            <a:schemeClr val="accent1"/>
-          </a:lnRef>
-          <a:fillRef idx="3">
-            <a:schemeClr val="accent1"/>
-          </a:fillRef>
-          <a:effectRef idx="2">
-            <a:schemeClr val="accent1"/>
-          </a:effectRef>
-          <a:fontRef idx="minor">
-            <a:schemeClr val="lt1"/>
-          </a:fontRef>
-        </p:style>
-        <p:txBody>
-          <a:bodyPr rtlCol="0" anchor="ctr"/>
-          <a:lstStyle/>
-          <a:p>
-            <a:pPr algn="ctr"/>
-          </a:p>
-        </p:txBody>
-      </p:sp>
-      <p:sp>
-        <p:nvSpPr>
-          <p:cNvPr id="16" name="TextBox 15"/>
-          <p:cNvSpPr txBox="1"/>
-          <p:nvPr/>
-        </p:nvSpPr>
-        <p:spPr>
-          <a:xfrm>
-            <a:off x="5241340" y="1719072"/>
-            <a:ext cx="1700784" cy="310896"/>
-          </a:xfrm>
-          <a:prstGeom prst="rect">
-            <a:avLst/>
-          </a:prstGeom>
-          <a:noFill/>
-        </p:spPr>
-        <p:txBody>
-          <a:bodyPr wrap="square" lIns="0" rIns="0" tIns="0" bIns="0">
-            <a:spAutoFit/>
-          </a:bodyPr>
-          <a:lstStyle/>
-          <a:p>
-            <a:pPr>
-              <a:lnSpc>
-                <a:spcPct val="100000"/>
-              </a:lnSpc>
-            </a:pPr>
-            <a:r>
-              <a:rPr sz="1400" b="1">
-                <a:solidFill>
-                  <a:srgbClr val="FFFFFF"/>
-                </a:solidFill>
-                <a:latin typeface="Calibri"/>
-              </a:rPr>
-              <a:t>Services</a:t>
-            </a:r>
-          </a:p>
-        </p:txBody>
-      </p:sp>
-      <p:sp>
-        <p:nvSpPr>
-          <p:cNvPr id="17" name="TextBox 16"/>
-          <p:cNvSpPr txBox="1"/>
-          <p:nvPr/>
-        </p:nvSpPr>
-        <p:spPr>
-          <a:xfrm>
-            <a:off x="5241340" y="2212848"/>
-            <a:ext cx="1700784" cy="2514600"/>
-          </a:xfrm>
-          <a:prstGeom prst="rect">
-            <a:avLst/>
-          </a:prstGeom>
-          <a:noFill/>
-        </p:spPr>
-        <p:txBody>
-          <a:bodyPr wrap="square" lIns="0" rIns="0" tIns="0" bIns="0">
-            <a:spAutoFit/>
-          </a:bodyPr>
-          <a:lstStyle/>
-          <a:p>
-            <a:pPr>
-              <a:lnSpc>
-                <a:spcPct val="108000"/>
-              </a:lnSpc>
-            </a:pPr>
-            <a:r>
-              <a:rPr sz="1100" b="0">
-                <a:solidFill>
-                  <a:srgbClr val="4F5560"/>
-                </a:solidFill>
-                <a:latin typeface="Calibri"/>
-              </a:rPr>
-              <a:t>A published service map, published prices, non-discriminatory access.</a:t>
-            </a:r>
-          </a:p>
-          <a:p>
-            <a:pPr>
-              <a:lnSpc>
-                <a:spcPct val="108000"/>
-              </a:lnSpc>
-            </a:pPr>
-            <a:r>
-              <a:rPr sz="1100" b="0">
-                <a:solidFill>
-                  <a:srgbClr val="4F5560"/>
-                </a:solidFill>
-                <a:latin typeface="Calibri"/>
-              </a:rPr>
-              <a:t/>
-            </a:r>
-          </a:p>
-          <a:p>
-            <a:pPr>
-              <a:lnSpc>
-                <a:spcPct val="108000"/>
-              </a:lnSpc>
-            </a:pPr>
-            <a:r>
-              <a:rPr sz="1100" b="0">
-                <a:solidFill>
-                  <a:srgbClr val="4F5560"/>
-                </a:solidFill>
-                <a:latin typeface="Calibri"/>
-              </a:rPr>
-              <a:t>A competitive market above the operator, not owned by it.</a:t>
-            </a:r>
-          </a:p>
-          <a:p>
-            <a:pPr>
-              <a:lnSpc>
-                <a:spcPct val="108000"/>
-              </a:lnSpc>
-            </a:pPr>
-            <a:r>
-              <a:rPr sz="1100" b="0">
-                <a:solidFill>
-                  <a:srgbClr val="4F5560"/>
-                </a:solidFill>
-                <a:latin typeface="Calibri"/>
-              </a:rPr>
-              <a:t/>
-            </a:r>
-          </a:p>
-          <a:p>
-            <a:pPr>
-              <a:lnSpc>
-                <a:spcPct val="108000"/>
-              </a:lnSpc>
-            </a:pPr>
-            <a:r>
-              <a:rPr sz="1100" b="0">
-                <a:solidFill>
-                  <a:srgbClr val="4F5560"/>
-                </a:solidFill>
-                <a:latin typeface="Calibri"/>
-              </a:rPr>
-              <a:t>Art. 57, 62</a:t>
-            </a:r>
-          </a:p>
-        </p:txBody>
-      </p:sp>
-      <p:sp>
-        <p:nvSpPr>
-          <p:cNvPr id="18" name="Rounded Rectangle 17"/>
-          <p:cNvSpPr/>
-          <p:nvPr/>
-        </p:nvSpPr>
-        <p:spPr>
-          <a:xfrm>
-            <a:off x="7285939" y="1645920"/>
-            <a:ext cx="2103120" cy="3246120"/>
-          </a:xfrm>
-          <a:prstGeom prst="roundRect">
-            <a:avLst>
-              <a:gd name="adj" fmla="val 5000"/>
-            </a:avLst>
-          </a:prstGeom>
-          <a:solidFill>
-            <a:srgbClr val="F4EFE6"/>
-          </a:solidFill>
-          <a:ln>
-            <a:noFill/>
-          </a:ln>
-          <a:effectLst/>
-        </p:spPr>
-        <p:style>
-          <a:lnRef idx="1">
-            <a:schemeClr val="accent1"/>
-          </a:lnRef>
-          <a:fillRef idx="3">
-            <a:schemeClr val="accent1"/>
-          </a:fillRef>
-          <a:effectRef idx="2">
-            <a:schemeClr val="accent1"/>
-          </a:effectRef>
-          <a:fontRef idx="minor">
-            <a:schemeClr val="lt1"/>
-          </a:fontRef>
-        </p:style>
-        <p:txBody>
-          <a:bodyPr rtlCol="0" anchor="ctr"/>
-          <a:lstStyle/>
-          <a:p>
-            <a:pPr algn="ctr"/>
-          </a:p>
-        </p:txBody>
-      </p:sp>
-      <p:sp>
-        <p:nvSpPr>
-          <p:cNvPr id="19" name="Rectangle 18"/>
-          <p:cNvSpPr/>
-          <p:nvPr/>
-        </p:nvSpPr>
-        <p:spPr>
-          <a:xfrm>
-            <a:off x="7285939" y="1645920"/>
-            <a:ext cx="2103120" cy="384048"/>
-          </a:xfrm>
-          <a:prstGeom prst="rect">
-            <a:avLst/>
-          </a:prstGeom>
-          <a:solidFill>
-            <a:srgbClr val="C31E2E"/>
-          </a:solidFill>
-          <a:ln>
-            <a:noFill/>
-          </a:ln>
-          <a:effectLst/>
-        </p:spPr>
-        <p:style>
-          <a:lnRef idx="1">
-            <a:schemeClr val="accent1"/>
-          </a:lnRef>
-          <a:fillRef idx="3">
-            <a:schemeClr val="accent1"/>
-          </a:fillRef>
-          <a:effectRef idx="2">
-            <a:schemeClr val="accent1"/>
-          </a:effectRef>
-          <a:fontRef idx="minor">
-            <a:schemeClr val="lt1"/>
-          </a:fontRef>
-        </p:style>
-        <p:txBody>
-          <a:bodyPr rtlCol="0" anchor="ctr"/>
-          <a:lstStyle/>
-          <a:p>
-            <a:pPr algn="ctr"/>
-          </a:p>
-        </p:txBody>
-      </p:sp>
-      <p:sp>
-        <p:nvSpPr>
-          <p:cNvPr id="20" name="TextBox 19"/>
-          <p:cNvSpPr txBox="1"/>
-          <p:nvPr/>
-        </p:nvSpPr>
-        <p:spPr>
-          <a:xfrm>
-            <a:off x="7487107" y="1719072"/>
-            <a:ext cx="1700784" cy="310896"/>
-          </a:xfrm>
-          <a:prstGeom prst="rect">
-            <a:avLst/>
-          </a:prstGeom>
-          <a:noFill/>
-        </p:spPr>
-        <p:txBody>
-          <a:bodyPr wrap="square" lIns="0" rIns="0" tIns="0" bIns="0">
-            <a:spAutoFit/>
-          </a:bodyPr>
-          <a:lstStyle/>
-          <a:p>
-            <a:pPr>
-              <a:lnSpc>
-                <a:spcPct val="100000"/>
-              </a:lnSpc>
-            </a:pPr>
-            <a:r>
-              <a:rPr sz="1400" b="1">
-                <a:solidFill>
-                  <a:srgbClr val="FFFFFF"/>
-                </a:solidFill>
-                <a:latin typeface="Calibri"/>
-              </a:rPr>
-              <a:t>Incidents</a:t>
-            </a:r>
-          </a:p>
-        </p:txBody>
-      </p:sp>
-      <p:sp>
-        <p:nvSpPr>
-          <p:cNvPr id="21" name="TextBox 20"/>
-          <p:cNvSpPr txBox="1"/>
-          <p:nvPr/>
-        </p:nvSpPr>
-        <p:spPr>
-          <a:xfrm>
-            <a:off x="7487107" y="2212848"/>
-            <a:ext cx="1700784" cy="2514600"/>
-          </a:xfrm>
-          <a:prstGeom prst="rect">
-            <a:avLst/>
-          </a:prstGeom>
-          <a:noFill/>
-        </p:spPr>
-        <p:txBody>
-          <a:bodyPr wrap="square" lIns="0" rIns="0" tIns="0" bIns="0">
-            <a:spAutoFit/>
-          </a:bodyPr>
-          <a:lstStyle/>
-          <a:p>
-            <a:pPr>
-              <a:lnSpc>
-                <a:spcPct val="108000"/>
-              </a:lnSpc>
-            </a:pPr>
-            <a:r>
-              <a:rPr sz="1100" b="0">
-                <a:solidFill>
-                  <a:srgbClr val="4F5560"/>
-                </a:solidFill>
-                <a:latin typeface="Calibri"/>
-              </a:rPr>
-              <a:t>One record and one timeline across every party.</a:t>
-            </a:r>
-          </a:p>
-          <a:p>
-            <a:pPr>
-              <a:lnSpc>
-                <a:spcPct val="108000"/>
-              </a:lnSpc>
-            </a:pPr>
-            <a:r>
-              <a:rPr sz="1100" b="0">
-                <a:solidFill>
-                  <a:srgbClr val="4F5560"/>
-                </a:solidFill>
-                <a:latin typeface="Calibri"/>
-              </a:rPr>
-              <a:t/>
-            </a:r>
-          </a:p>
-          <a:p>
-            <a:pPr>
-              <a:lnSpc>
-                <a:spcPct val="108000"/>
-              </a:lnSpc>
-            </a:pPr>
-            <a:r>
-              <a:rPr sz="1100" b="0">
-                <a:solidFill>
-                  <a:srgbClr val="4F5560"/>
-                </a:solidFill>
-                <a:latin typeface="Calibri"/>
-              </a:rPr>
-              <a:t>A permit-scope breach is escalated, never quietly fixed.</a:t>
-            </a:r>
-          </a:p>
-          <a:p>
-            <a:pPr>
-              <a:lnSpc>
-                <a:spcPct val="108000"/>
-              </a:lnSpc>
-            </a:pPr>
-            <a:r>
-              <a:rPr sz="1100" b="0">
-                <a:solidFill>
-                  <a:srgbClr val="4F5560"/>
-                </a:solidFill>
-                <a:latin typeface="Calibri"/>
-              </a:rPr>
-              <a:t/>
-            </a:r>
-          </a:p>
-          <a:p>
-            <a:pPr>
-              <a:lnSpc>
-                <a:spcPct val="108000"/>
-              </a:lnSpc>
-            </a:pPr>
-            <a:r>
-              <a:rPr sz="1100" b="0">
-                <a:solidFill>
-                  <a:srgbClr val="4F5560"/>
-                </a:solidFill>
-                <a:latin typeface="Calibri"/>
-              </a:rPr>
-              <a:t>Art. 63, 73(3)</a:t>
-            </a:r>
-          </a:p>
-        </p:txBody>
-      </p:sp>
-      <p:sp>
-        <p:nvSpPr>
-          <p:cNvPr id="22" name="Rounded Rectangle 21"/>
-          <p:cNvSpPr/>
-          <p:nvPr/>
-        </p:nvSpPr>
-        <p:spPr>
-          <a:xfrm>
-            <a:off x="9531705" y="1645920"/>
-            <a:ext cx="2103120" cy="3246120"/>
-          </a:xfrm>
-          <a:prstGeom prst="roundRect">
-            <a:avLst>
-              <a:gd name="adj" fmla="val 5000"/>
-            </a:avLst>
-          </a:prstGeom>
-          <a:solidFill>
-            <a:srgbClr val="F4EFE6"/>
-          </a:solidFill>
-          <a:ln>
-            <a:noFill/>
-          </a:ln>
-          <a:effectLst/>
-        </p:spPr>
-        <p:style>
-          <a:lnRef idx="1">
-            <a:schemeClr val="accent1"/>
-          </a:lnRef>
-          <a:fillRef idx="3">
-            <a:schemeClr val="accent1"/>
-          </a:fillRef>
-          <a:effectRef idx="2">
-            <a:schemeClr val="accent1"/>
-          </a:effectRef>
-          <a:fontRef idx="minor">
-            <a:schemeClr val="lt1"/>
-          </a:fontRef>
-        </p:style>
-        <p:txBody>
-          <a:bodyPr rtlCol="0" anchor="ctr"/>
-          <a:lstStyle/>
-          <a:p>
-            <a:pPr algn="ctr"/>
-          </a:p>
-        </p:txBody>
-      </p:sp>
-      <p:sp>
-        <p:nvSpPr>
-          <p:cNvPr id="23" name="Rectangle 22"/>
-          <p:cNvSpPr/>
-          <p:nvPr/>
-        </p:nvSpPr>
-        <p:spPr>
-          <a:xfrm>
-            <a:off x="9531705" y="1645920"/>
-            <a:ext cx="2103120" cy="384048"/>
-          </a:xfrm>
-          <a:prstGeom prst="rect">
-            <a:avLst/>
-          </a:prstGeom>
-          <a:solidFill>
-            <a:srgbClr val="E6A817"/>
-          </a:solidFill>
-          <a:ln>
-            <a:noFill/>
-          </a:ln>
-          <a:effectLst/>
-        </p:spPr>
-        <p:style>
-          <a:lnRef idx="1">
-            <a:schemeClr val="accent1"/>
-          </a:lnRef>
-          <a:fillRef idx="3">
-            <a:schemeClr val="accent1"/>
-          </a:fillRef>
-          <a:effectRef idx="2">
-            <a:schemeClr val="accent1"/>
-          </a:effectRef>
-          <a:fontRef idx="minor">
-            <a:schemeClr val="lt1"/>
-          </a:fontRef>
-        </p:style>
-        <p:txBody>
-          <a:bodyPr rtlCol="0" anchor="ctr"/>
-          <a:lstStyle/>
-          <a:p>
-            <a:pPr algn="ctr"/>
-          </a:p>
-        </p:txBody>
-      </p:sp>
-      <p:sp>
-        <p:nvSpPr>
-          <p:cNvPr id="24" name="TextBox 23"/>
-          <p:cNvSpPr txBox="1"/>
-          <p:nvPr/>
-        </p:nvSpPr>
-        <p:spPr>
-          <a:xfrm>
-            <a:off x="9732873" y="1719072"/>
-            <a:ext cx="1700784" cy="310896"/>
-          </a:xfrm>
-          <a:prstGeom prst="rect">
-            <a:avLst/>
-          </a:prstGeom>
-          <a:noFill/>
-        </p:spPr>
-        <p:txBody>
-          <a:bodyPr wrap="square" lIns="0" rIns="0" tIns="0" bIns="0">
-            <a:spAutoFit/>
-          </a:bodyPr>
-          <a:lstStyle/>
-          <a:p>
-            <a:pPr>
-              <a:lnSpc>
-                <a:spcPct val="100000"/>
-              </a:lnSpc>
-            </a:pPr>
-            <a:r>
-              <a:rPr sz="1400" b="1">
-                <a:solidFill>
-                  <a:srgbClr val="FFFFFF"/>
-                </a:solidFill>
-                <a:latin typeface="Calibri"/>
-              </a:rPr>
-              <a:t>Support</a:t>
-            </a:r>
-          </a:p>
-        </p:txBody>
-      </p:sp>
-      <p:sp>
-        <p:nvSpPr>
-          <p:cNvPr id="25" name="TextBox 24"/>
-          <p:cNvSpPr txBox="1"/>
-          <p:nvPr/>
-        </p:nvSpPr>
-        <p:spPr>
-          <a:xfrm>
-            <a:off x="9732873" y="2212848"/>
-            <a:ext cx="1700784" cy="2514600"/>
-          </a:xfrm>
-          <a:prstGeom prst="rect">
-            <a:avLst/>
-          </a:prstGeom>
-          <a:noFill/>
-        </p:spPr>
-        <p:txBody>
-          <a:bodyPr wrap="square" lIns="0" rIns="0" tIns="0" bIns="0">
-            <a:spAutoFit/>
-          </a:bodyPr>
-          <a:lstStyle/>
-          <a:p>
-            <a:pPr>
-              <a:lnSpc>
-                <a:spcPct val="108000"/>
-              </a:lnSpc>
-            </a:pPr>
-            <a:r>
-              <a:rPr sz="1100" b="0">
-                <a:solidFill>
-                  <a:srgbClr val="4F5560"/>
-                </a:solidFill>
-                <a:latin typeface="Calibri"/>
-              </a:rPr>
-              <a:t>L1 in Spanish, L2 per service, L3 with the suppliers.</a:t>
-            </a:r>
-          </a:p>
-          <a:p>
-            <a:pPr>
-              <a:lnSpc>
-                <a:spcPct val="108000"/>
-              </a:lnSpc>
-            </a:pPr>
-            <a:r>
-              <a:rPr sz="1100" b="0">
-                <a:solidFill>
-                  <a:srgbClr val="4F5560"/>
-                </a:solidFill>
-                <a:latin typeface="Calibri"/>
-              </a:rPr>
-              <a:t/>
-            </a:r>
-          </a:p>
-          <a:p>
-            <a:pPr>
-              <a:lnSpc>
-                <a:spcPct val="108000"/>
-              </a:lnSpc>
-            </a:pPr>
-            <a:r>
-              <a:rPr sz="1100" b="0">
-                <a:solidFill>
-                  <a:srgbClr val="4F5560"/>
-                </a:solidFill>
-                <a:latin typeface="Calibri"/>
-              </a:rPr>
-              <a:t>Plus holder success and a researcher feasibility desk.</a:t>
-            </a:r>
-          </a:p>
-          <a:p>
-            <a:pPr>
-              <a:lnSpc>
-                <a:spcPct val="108000"/>
-              </a:lnSpc>
-            </a:pPr>
-            <a:r>
-              <a:rPr sz="1100" b="0">
-                <a:solidFill>
-                  <a:srgbClr val="4F5560"/>
-                </a:solidFill>
-                <a:latin typeface="Calibri"/>
-              </a:rPr>
-              <a:t/>
-            </a:r>
-          </a:p>
-          <a:p>
-            <a:pPr>
-              <a:lnSpc>
-                <a:spcPct val="108000"/>
-              </a:lnSpc>
-            </a:pPr>
-            <a:r>
-              <a:rPr sz="1100" b="0">
-                <a:solidFill>
-                  <a:srgbClr val="4F5560"/>
-                </a:solidFill>
-                <a:latin typeface="Calibri"/>
-              </a:rPr>
-              <a:t>Art. 82</a:t>
-            </a:r>
-          </a:p>
-        </p:txBody>
-      </p:sp>
-      <p:sp>
-        <p:nvSpPr>
-          <p:cNvPr id="26" name="Rounded Rectangle 25"/>
-          <p:cNvSpPr/>
-          <p:nvPr/>
-        </p:nvSpPr>
-        <p:spPr>
-          <a:xfrm>
-            <a:off x="548640" y="5120640"/>
-            <a:ext cx="11091672" cy="1143000"/>
-          </a:xfrm>
-          <a:prstGeom prst="roundRect">
-            <a:avLst>
-              <a:gd name="adj" fmla="val 5000"/>
-            </a:avLst>
-          </a:prstGeom>
-          <a:solidFill>
-            <a:srgbClr val="F4EFE6"/>
-          </a:solidFill>
-          <a:ln>
-            <a:noFill/>
-          </a:ln>
-          <a:effectLst/>
-        </p:spPr>
-        <p:style>
-          <a:lnRef idx="1">
-            <a:schemeClr val="accent1"/>
-          </a:lnRef>
-          <a:fillRef idx="3">
-            <a:schemeClr val="accent1"/>
-          </a:fillRef>
-          <a:effectRef idx="2">
-            <a:schemeClr val="accent1"/>
-          </a:effectRef>
-          <a:fontRef idx="minor">
-            <a:schemeClr val="lt1"/>
-          </a:fontRef>
-        </p:style>
-        <p:txBody>
-          <a:bodyPr rtlCol="0" anchor="ctr"/>
-          <a:lstStyle/>
-          <a:p>
-            <a:pPr algn="ctr"/>
-          </a:p>
-        </p:txBody>
-      </p:sp>
-      <p:sp>
-        <p:nvSpPr>
-          <p:cNvPr id="27" name="Rounded Rectangle 26"/>
-          <p:cNvSpPr/>
-          <p:nvPr/>
-        </p:nvSpPr>
-        <p:spPr>
-          <a:xfrm>
-            <a:off x="868680" y="5321808"/>
-            <a:ext cx="1188720" cy="347472"/>
-          </a:xfrm>
-          <a:prstGeom prst="roundRect">
-            <a:avLst>
-              <a:gd name="adj" fmla="val 5000"/>
-            </a:avLst>
-          </a:prstGeom>
-          <a:solidFill>
-            <a:srgbClr val="2A9D8F"/>
-          </a:solidFill>
-          <a:ln>
-            <a:noFill/>
-          </a:ln>
-          <a:effectLst/>
-        </p:spPr>
-        <p:style>
-          <a:lnRef idx="1">
-            <a:schemeClr val="accent1"/>
-          </a:lnRef>
-          <a:fillRef idx="3">
-            <a:schemeClr val="accent1"/>
-          </a:fillRef>
-          <a:effectRef idx="2">
-            <a:schemeClr val="accent1"/>
-          </a:effectRef>
-          <a:fontRef idx="minor">
-            <a:schemeClr val="lt1"/>
-          </a:fontRef>
-        </p:style>
-        <p:txBody>
-          <a:bodyPr rtlCol="0" anchor="ctr"/>
-          <a:lstStyle/>
-          <a:p>
-            <a:pPr algn="ctr"/>
-          </a:p>
-        </p:txBody>
-      </p:sp>
-      <p:sp>
-        <p:nvSpPr>
-          <p:cNvPr id="28" name="TextBox 27"/>
-          <p:cNvSpPr txBox="1"/>
-          <p:nvPr/>
-        </p:nvSpPr>
-        <p:spPr>
-          <a:xfrm>
-            <a:off x="868680" y="5394960"/>
-            <a:ext cx="1188720" cy="228600"/>
-          </a:xfrm>
-          <a:prstGeom prst="rect">
-            <a:avLst/>
-          </a:prstGeom>
-          <a:noFill/>
-        </p:spPr>
-        <p:txBody>
-          <a:bodyPr wrap="square" lIns="0" rIns="0" tIns="0" bIns="0">
-            <a:spAutoFit/>
-          </a:bodyPr>
-          <a:lstStyle/>
-          <a:p>
-            <a:pPr algn="ctr">
-              <a:lnSpc>
-                <a:spcPct val="100000"/>
-              </a:lnSpc>
-            </a:pPr>
-            <a:r>
-              <a:rPr sz="1200" b="1">
-                <a:solidFill>
-                  <a:srgbClr val="FFFFFF"/>
-                </a:solidFill>
-                <a:latin typeface="Calibri"/>
-              </a:rPr>
-              <a:t>Mar 2027</a:t>
-            </a:r>
-          </a:p>
-        </p:txBody>
-      </p:sp>
-      <p:sp>
-        <p:nvSpPr>
-          <p:cNvPr id="29" name="TextBox 28"/>
-          <p:cNvSpPr txBox="1"/>
-          <p:nvPr/>
-        </p:nvSpPr>
-        <p:spPr>
-          <a:xfrm>
-            <a:off x="868680" y="5779008"/>
-            <a:ext cx="2514600" cy="457200"/>
-          </a:xfrm>
-          <a:prstGeom prst="rect">
-            <a:avLst/>
-          </a:prstGeom>
-          <a:noFill/>
-        </p:spPr>
-        <p:txBody>
-          <a:bodyPr wrap="square" lIns="0" rIns="0" tIns="0" bIns="0">
-            <a:spAutoFit/>
-          </a:bodyPr>
-          <a:lstStyle/>
-          <a:p>
-            <a:pPr>
-              <a:lnSpc>
-                <a:spcPct val="105000"/>
-              </a:lnSpc>
-            </a:pPr>
-            <a:r>
-              <a:rPr sz="1050" b="0">
-                <a:solidFill>
-                  <a:srgbClr val="4F5560"/>
-                </a:solidFill>
-                <a:latin typeface="Calibri"/>
-              </a:rPr>
-              <a:t>Access bodies and the national</a:t>
-            </a:r>
-          </a:p>
-          <a:p>
-            <a:pPr>
-              <a:lnSpc>
-                <a:spcPct val="105000"/>
-              </a:lnSpc>
-            </a:pPr>
-            <a:r>
-              <a:rPr sz="1050" b="0">
-                <a:solidFill>
-                  <a:srgbClr val="4F5560"/>
-                </a:solidFill>
-                <a:latin typeface="Calibri"/>
-              </a:rPr>
-              <a:t>contact point designated. Art. 55(6), 75(1)</a:t>
-            </a:r>
-          </a:p>
-        </p:txBody>
-      </p:sp>
-      <p:sp>
-        <p:nvSpPr>
-          <p:cNvPr id="30" name="Rounded Rectangle 29"/>
-          <p:cNvSpPr/>
-          <p:nvPr/>
-        </p:nvSpPr>
-        <p:spPr>
-          <a:xfrm>
-            <a:off x="3611880" y="5321808"/>
-            <a:ext cx="1188720" cy="347472"/>
-          </a:xfrm>
-          <a:prstGeom prst="roundRect">
-            <a:avLst>
-              <a:gd name="adj" fmla="val 5000"/>
-            </a:avLst>
-          </a:prstGeom>
-          <a:solidFill>
-            <a:srgbClr val="528B55"/>
-          </a:solidFill>
-          <a:ln>
-            <a:noFill/>
-          </a:ln>
-          <a:effectLst/>
-        </p:spPr>
-        <p:style>
-          <a:lnRef idx="1">
-            <a:schemeClr val="accent1"/>
-          </a:lnRef>
-          <a:fillRef idx="3">
-            <a:schemeClr val="accent1"/>
-          </a:fillRef>
-          <a:effectRef idx="2">
-            <a:schemeClr val="accent1"/>
-          </a:effectRef>
-          <a:fontRef idx="minor">
-            <a:schemeClr val="lt1"/>
-          </a:fontRef>
-        </p:style>
-        <p:txBody>
-          <a:bodyPr rtlCol="0" anchor="ctr"/>
-          <a:lstStyle/>
-          <a:p>
-            <a:pPr algn="ctr"/>
-          </a:p>
-        </p:txBody>
-      </p:sp>
-      <p:sp>
-        <p:nvSpPr>
-          <p:cNvPr id="31" name="TextBox 30"/>
-          <p:cNvSpPr txBox="1"/>
-          <p:nvPr/>
-        </p:nvSpPr>
-        <p:spPr>
-          <a:xfrm>
-            <a:off x="3611880" y="5394960"/>
-            <a:ext cx="1188720" cy="228600"/>
-          </a:xfrm>
-          <a:prstGeom prst="rect">
-            <a:avLst/>
-          </a:prstGeom>
-          <a:noFill/>
-        </p:spPr>
-        <p:txBody>
-          <a:bodyPr wrap="square" lIns="0" rIns="0" tIns="0" bIns="0">
-            <a:spAutoFit/>
-          </a:bodyPr>
-          <a:lstStyle/>
-          <a:p>
-            <a:pPr algn="ctr">
-              <a:lnSpc>
-                <a:spcPct val="100000"/>
-              </a:lnSpc>
-            </a:pPr>
-            <a:r>
-              <a:rPr sz="1200" b="1">
-                <a:solidFill>
-                  <a:srgbClr val="FFFFFF"/>
-                </a:solidFill>
-                <a:latin typeface="Calibri"/>
-              </a:rPr>
-              <a:t>Mar 2029</a:t>
-            </a:r>
-          </a:p>
-        </p:txBody>
-      </p:sp>
-      <p:sp>
-        <p:nvSpPr>
-          <p:cNvPr id="32" name="TextBox 31"/>
-          <p:cNvSpPr txBox="1"/>
-          <p:nvPr/>
-        </p:nvSpPr>
-        <p:spPr>
-          <a:xfrm>
-            <a:off x="3611880" y="5779008"/>
-            <a:ext cx="2514600" cy="457200"/>
-          </a:xfrm>
-          <a:prstGeom prst="rect">
-            <a:avLst/>
-          </a:prstGeom>
-          <a:noFill/>
-        </p:spPr>
-        <p:txBody>
-          <a:bodyPr wrap="square" lIns="0" rIns="0" tIns="0" bIns="0">
-            <a:spAutoFit/>
-          </a:bodyPr>
-          <a:lstStyle/>
-          <a:p>
-            <a:pPr>
-              <a:lnSpc>
-                <a:spcPct val="105000"/>
-              </a:lnSpc>
-            </a:pPr>
-            <a:r>
-              <a:rPr sz="1050" b="0">
-                <a:solidFill>
-                  <a:srgbClr val="4F5560"/>
-                </a:solidFill>
-                <a:latin typeface="Calibri"/>
-              </a:rPr>
-              <a:t>Chapter IV in full: permits,</a:t>
-            </a:r>
-          </a:p>
-          <a:p>
-            <a:pPr>
-              <a:lnSpc>
-                <a:spcPct val="105000"/>
-              </a:lnSpc>
-            </a:pPr>
-            <a:r>
-              <a:rPr sz="1050" b="0">
-                <a:solidFill>
-                  <a:srgbClr val="4F5560"/>
-                </a:solidFill>
-                <a:latin typeface="Calibri"/>
-              </a:rPr>
-              <a:t>environments, HealthData@EU</a:t>
-            </a:r>
-          </a:p>
-        </p:txBody>
-      </p:sp>
-      <p:sp>
-        <p:nvSpPr>
-          <p:cNvPr id="33" name="Rounded Rectangle 32"/>
-          <p:cNvSpPr/>
-          <p:nvPr/>
-        </p:nvSpPr>
-        <p:spPr>
-          <a:xfrm>
-            <a:off x="6355080" y="5321808"/>
-            <a:ext cx="1188720" cy="347472"/>
-          </a:xfrm>
-          <a:prstGeom prst="roundRect">
-            <a:avLst>
-              <a:gd name="adj" fmla="val 5000"/>
-            </a:avLst>
-          </a:prstGeom>
-          <a:solidFill>
-            <a:srgbClr val="E6A817"/>
-          </a:solidFill>
-          <a:ln>
-            <a:noFill/>
-          </a:ln>
-          <a:effectLst/>
-        </p:spPr>
-        <p:style>
-          <a:lnRef idx="1">
-            <a:schemeClr val="accent1"/>
-          </a:lnRef>
-          <a:fillRef idx="3">
-            <a:schemeClr val="accent1"/>
-          </a:fillRef>
-          <a:effectRef idx="2">
-            <a:schemeClr val="accent1"/>
-          </a:effectRef>
-          <a:fontRef idx="minor">
-            <a:schemeClr val="lt1"/>
-          </a:fontRef>
-        </p:style>
-        <p:txBody>
-          <a:bodyPr rtlCol="0" anchor="ctr"/>
-          <a:lstStyle/>
-          <a:p>
-            <a:pPr algn="ctr"/>
-          </a:p>
-        </p:txBody>
-      </p:sp>
-      <p:sp>
-        <p:nvSpPr>
-          <p:cNvPr id="34" name="TextBox 33"/>
-          <p:cNvSpPr txBox="1"/>
-          <p:nvPr/>
-        </p:nvSpPr>
-        <p:spPr>
-          <a:xfrm>
-            <a:off x="6355080" y="5394960"/>
-            <a:ext cx="1188720" cy="228600"/>
-          </a:xfrm>
-          <a:prstGeom prst="rect">
-            <a:avLst/>
-          </a:prstGeom>
-          <a:noFill/>
-        </p:spPr>
-        <p:txBody>
-          <a:bodyPr wrap="square" lIns="0" rIns="0" tIns="0" bIns="0">
-            <a:spAutoFit/>
-          </a:bodyPr>
-          <a:lstStyle/>
-          <a:p>
-            <a:pPr algn="ctr">
-              <a:lnSpc>
-                <a:spcPct val="100000"/>
-              </a:lnSpc>
-            </a:pPr>
-            <a:r>
-              <a:rPr sz="1200" b="1">
-                <a:solidFill>
-                  <a:srgbClr val="FFFFFF"/>
-                </a:solidFill>
-                <a:latin typeface="Calibri"/>
-              </a:rPr>
-              <a:t>Mar 2031</a:t>
-            </a:r>
-          </a:p>
-        </p:txBody>
-      </p:sp>
-      <p:sp>
-        <p:nvSpPr>
-          <p:cNvPr id="35" name="TextBox 34"/>
-          <p:cNvSpPr txBox="1"/>
-          <p:nvPr/>
-        </p:nvSpPr>
-        <p:spPr>
-          <a:xfrm>
-            <a:off x="6355080" y="5779008"/>
-            <a:ext cx="2514600" cy="457200"/>
-          </a:xfrm>
-          <a:prstGeom prst="rect">
-            <a:avLst/>
-          </a:prstGeom>
-          <a:noFill/>
-        </p:spPr>
-        <p:txBody>
-          <a:bodyPr wrap="square" lIns="0" rIns="0" tIns="0" bIns="0">
-            <a:spAutoFit/>
-          </a:bodyPr>
-          <a:lstStyle/>
-          <a:p>
-            <a:pPr>
-              <a:lnSpc>
-                <a:spcPct val="105000"/>
-              </a:lnSpc>
-            </a:pPr>
-            <a:r>
-              <a:rPr sz="1050" b="0">
-                <a:solidFill>
-                  <a:srgbClr val="4F5560"/>
-                </a:solidFill>
-                <a:latin typeface="Calibri"/>
-              </a:rPr>
-              <a:t>The wider data categories</a:t>
-            </a:r>
-          </a:p>
-          <a:p>
-            <a:pPr>
-              <a:lnSpc>
-                <a:spcPct val="105000"/>
-              </a:lnSpc>
-            </a:pPr>
-            <a:r>
-              <a:rPr sz="1050" b="0">
-                <a:solidFill>
-                  <a:srgbClr val="4F5560"/>
-                </a:solidFill>
-                <a:latin typeface="Calibri"/>
-              </a:rPr>
-              <a:t>in Art. 51(1)</a:t>
-            </a:r>
-          </a:p>
-        </p:txBody>
-      </p:sp>
-      <p:sp>
-        <p:nvSpPr>
-          <p:cNvPr id="36" name="Rounded Rectangle 35"/>
-          <p:cNvSpPr/>
-          <p:nvPr/>
-        </p:nvSpPr>
-        <p:spPr>
-          <a:xfrm>
-            <a:off x="9098280" y="5321808"/>
-            <a:ext cx="1188720" cy="347472"/>
-          </a:xfrm>
-          <a:prstGeom prst="roundRect">
-            <a:avLst>
-              <a:gd name="adj" fmla="val 5000"/>
-            </a:avLst>
-          </a:prstGeom>
-          <a:solidFill>
-            <a:srgbClr val="143D59"/>
-          </a:solidFill>
-          <a:ln>
-            <a:noFill/>
-          </a:ln>
-          <a:effectLst/>
-        </p:spPr>
-        <p:style>
-          <a:lnRef idx="1">
-            <a:schemeClr val="accent1"/>
-          </a:lnRef>
-          <a:fillRef idx="3">
-            <a:schemeClr val="accent1"/>
-          </a:fillRef>
-          <a:effectRef idx="2">
-            <a:schemeClr val="accent1"/>
-          </a:effectRef>
-          <a:fontRef idx="minor">
-            <a:schemeClr val="lt1"/>
-          </a:fontRef>
-        </p:style>
-        <p:txBody>
-          <a:bodyPr rtlCol="0" anchor="ctr"/>
-          <a:lstStyle/>
-          <a:p>
-            <a:pPr algn="ctr"/>
-          </a:p>
-        </p:txBody>
-      </p:sp>
-      <p:sp>
-        <p:nvSpPr>
-          <p:cNvPr id="37" name="TextBox 36"/>
-          <p:cNvSpPr txBox="1"/>
-          <p:nvPr/>
-        </p:nvSpPr>
-        <p:spPr>
-          <a:xfrm>
-            <a:off x="9098280" y="5394960"/>
-            <a:ext cx="1188720" cy="228600"/>
-          </a:xfrm>
-          <a:prstGeom prst="rect">
-            <a:avLst/>
-          </a:prstGeom>
-          <a:noFill/>
-        </p:spPr>
-        <p:txBody>
-          <a:bodyPr wrap="square" lIns="0" rIns="0" tIns="0" bIns="0">
-            <a:spAutoFit/>
-          </a:bodyPr>
-          <a:lstStyle/>
-          <a:p>
-            <a:pPr algn="ctr">
-              <a:lnSpc>
-                <a:spcPct val="100000"/>
-              </a:lnSpc>
-            </a:pPr>
-            <a:r>
-              <a:rPr sz="1200" b="1">
-                <a:solidFill>
-                  <a:srgbClr val="FFFFFF"/>
-                </a:solidFill>
-                <a:latin typeface="Calibri"/>
-              </a:rPr>
-              <a:t>Mar 2035</a:t>
-            </a:r>
-          </a:p>
-        </p:txBody>
-      </p:sp>
-      <p:sp>
-        <p:nvSpPr>
-          <p:cNvPr id="38" name="TextBox 37"/>
-          <p:cNvSpPr txBox="1"/>
-          <p:nvPr/>
-        </p:nvSpPr>
-        <p:spPr>
-          <a:xfrm>
-            <a:off x="9098280" y="5779008"/>
-            <a:ext cx="2514600" cy="457200"/>
-          </a:xfrm>
-          <a:prstGeom prst="rect">
-            <a:avLst/>
-          </a:prstGeom>
-          <a:noFill/>
-        </p:spPr>
-        <p:txBody>
-          <a:bodyPr wrap="square" lIns="0" rIns="0" tIns="0" bIns="0">
-            <a:spAutoFit/>
-          </a:bodyPr>
-          <a:lstStyle/>
-          <a:p>
-            <a:pPr>
-              <a:lnSpc>
-                <a:spcPct val="105000"/>
-              </a:lnSpc>
-            </a:pPr>
-            <a:r>
-              <a:rPr sz="1050" b="0">
-                <a:solidFill>
-                  <a:srgbClr val="4F5560"/>
-                </a:solidFill>
-                <a:latin typeface="Calibri"/>
-              </a:rPr>
-              <a:t>Third countries join</a:t>
-            </a:r>
-          </a:p>
-          <a:p>
-            <a:pPr>
-              <a:lnSpc>
-                <a:spcPct val="105000"/>
-              </a:lnSpc>
-            </a:pPr>
-            <a:r>
-              <a:rPr sz="1050" b="0">
-                <a:solidFill>
-                  <a:srgbClr val="4F5560"/>
-                </a:solidFill>
-                <a:latin typeface="Calibri"/>
-              </a:rPr>
-              <a:t>HealthData@EU. Art. 75(5)</a:t>
-            </a:r>
-          </a:p>
-        </p:txBody>
-      </p:sp>
-      <p:sp>
-        <p:nvSpPr>
-          <p:cNvPr id="39" name="TextBox 38"/>
+      <p:pic>
+        <p:nvPicPr>
+          <p:cNvPr id="6" name="Picture 5" descr="ehds-operating-model-primary.png"/>
+          <p:cNvPicPr>
+            <a:picLocks noChangeAspect="1"/>
+          </p:cNvPicPr>
+          <p:nvPr/>
+        </p:nvPicPr>
+        <p:blipFill>
+          <a:blip r:embed="rId2"/>
+          <a:stretch>
+            <a:fillRect/>
+          </a:stretch>
+        </p:blipFill>
+        <p:spPr>
+          <a:xfrm>
+            <a:off x="548640" y="1371600"/>
+            <a:ext cx="11091672" cy="4754880"/>
+          </a:xfrm>
+          <a:prstGeom prst="rect">
+            <a:avLst/>
+          </a:prstGeom>
+        </p:spPr>
+      </p:pic>
+      <p:sp>
+        <p:nvSpPr>
+          <p:cNvPr id="7" name="TextBox 6"/>
           <p:cNvSpPr txBox="1"/>
           <p:nvPr/>
         </p:nvSpPr>
@@ -7703,7 +5731,7 @@
                 </a:solidFill>
                 <a:latin typeface="Calibri"/>
               </a:rPr>
-              <a:t>Reg. (EU) 2025/327, Art. 57, 60, 62, 63, 73, 77, 78, 82, 105  ·  Catena-X, 'How: Data Space Operations'</a:t>
+              <a:t>catenax-ev.github.io/docs/operating-model  ·  data.europa.eu/eli/reg/2025/327/oj  ·  cofinity-x.com</a:t>
             </a:r>
           </a:p>
         </p:txBody>
@@ -8044,13 +6072,13 @@
               </a:lnSpc>
             </a:pPr>
             <a:r>
-              <a:rPr sz="1300" b="0">
+              <a:rPr sz="1250" b="0">
                 <a:solidFill>
                   <a:srgbClr val="4F5560"/>
                 </a:solidFill>
                 <a:latin typeface="Calibri"/>
               </a:rPr>
-              <a:t>•  One access body, or several with a coordinator?   Art. 55(1)</a:t>
+              <a:t>•  Which body is the digital health authority, and is it staffed?   Art. 19</a:t>
             </a:r>
           </a:p>
           <a:p>
@@ -8060,13 +6088,13 @@
               </a:lnSpc>
             </a:pPr>
             <a:r>
-              <a:rPr sz="1300" b="0">
+              <a:rPr sz="1250" b="0">
                 <a:solidFill>
                   <a:srgbClr val="4F5560"/>
                 </a:solidFill>
                 <a:latin typeface="Calibri"/>
               </a:rPr>
-              <a:t>•  Is the national contact point that same body, or separate?   Art. 75(1)</a:t>
+              <a:t>•  Which body is the national contact point for digital health?   Art. 23</a:t>
             </a:r>
           </a:p>
           <a:p>
@@ -8076,13 +6104,13 @@
               </a:lnSpc>
             </a:pPr>
             <a:r>
-              <a:rPr sz="1300" b="0">
+              <a:rPr sz="1250" b="0">
                 <a:solidFill>
                   <a:srgbClr val="4F5560"/>
                 </a:solidFill>
                 <a:latin typeface="Calibri"/>
               </a:rPr>
-              <a:t>•  Does the March 2027 designation have an owner and a budget line?</a:t>
+              <a:t>•  Are the 17 regions able to register the six categories?   Art. 13, 14</a:t>
             </a:r>
           </a:p>
           <a:p>
@@ -8092,13 +6120,13 @@
               </a:lnSpc>
             </a:pPr>
             <a:r>
-              <a:rPr sz="1300" b="0">
+              <a:rPr sz="1250" b="0">
                 <a:solidFill>
                   <a:srgbClr val="4F5560"/>
                 </a:solidFill>
                 <a:latin typeface="Calibri"/>
               </a:rPr>
-              <a:t>•  Which regions connect first, and who has the Art. 51 data inventory?</a:t>
+              <a:t>•  Who converts records into the European format, and who pays?   Art. 15</a:t>
             </a:r>
           </a:p>
           <a:p>
@@ -8108,13 +6136,13 @@
               </a:lnSpc>
             </a:pPr>
             <a:r>
-              <a:rPr sz="1300" b="0">
+              <a:rPr sz="1250" b="0">
                 <a:solidFill>
                   <a:srgbClr val="4F5560"/>
                 </a:solidFill>
                 <a:latin typeface="Calibri"/>
               </a:rPr>
-              <a:t>•  In-house entity, public-private joint venture, or tendered concession?</a:t>
+              <a:t>•  In-house entity, joint venture, or tendered concession, decided by when?</a:t>
             </a:r>
           </a:p>
         </p:txBody>
@@ -8475,7 +6503,7 @@
                 </a:solidFill>
                 <a:latin typeface="Calibri"/>
               </a:rPr>
-              <a:t>Better care for every citizen. Better research for every region. The last of those five questions is the one that decides whether anything is running by March 2029.</a:t>
+              <a:t>Better care for every citizen. Patient summaries, prescriptions and dispensations have to be live in March 2029, and counting procurement that is about two release years away.</a:t>
             </a:r>
           </a:p>
         </p:txBody>

--- a/docs/demos/spain-ehds-5-slides.pptx
+++ b/docs/demos/spain-ehds-5-slides.pptx
@@ -3321,7 +3321,7 @@
                 </a:solidFill>
                 <a:latin typeface="Calibri"/>
               </a:rPr>
-              <a:t>One health record that follows the citizen</a:t>
+              <a:t>Seventeen regional datasets, one research resource</a:t>
             </a:r>
           </a:p>
         </p:txBody>
@@ -3360,7 +3360,7 @@
                 </a:solidFill>
                 <a:latin typeface="Calibri"/>
               </a:rPr>
-              <a:t>across the 17 regions of Spain</a:t>
+              <a:t>secondary use of health data under the EHDS</a:t>
             </a:r>
           </a:p>
         </p:txBody>
@@ -3426,7 +3426,7 @@
             <a:avLst/>
           </a:prstGeom>
           <a:solidFill>
-            <a:srgbClr val="C31E2E"/>
+            <a:srgbClr val="2A9D8F"/>
           </a:solidFill>
           <a:ln>
             <a:noFill/>
@@ -3489,7 +3489,7 @@
                 </a:solidFill>
                 <a:latin typeface="Calibri"/>
               </a:rPr>
-              <a:t>Patients</a:t>
+              <a:t>Researchers</a:t>
             </a:r>
           </a:p>
         </p:txBody>
@@ -3528,7 +3528,7 @@
                 </a:solidFill>
                 <a:latin typeface="Calibri"/>
               </a:rPr>
-              <a:t>A citizen who lives in Madrid and falls ill in Seville cannot share their medical history easily.</a:t>
+              <a:t>Studying a rare disease across Spain means asking 17 separate regions for permission and for data.</a:t>
             </a:r>
           </a:p>
         </p:txBody>
@@ -3563,11 +3563,11 @@
             <a:r>
               <a:rPr sz="1100" b="1">
                 <a:solidFill>
-                  <a:srgbClr val="C31E2E"/>
+                  <a:srgbClr val="2A9D8F"/>
                 </a:solidFill>
                 <a:latin typeface="Calibri"/>
               </a:rPr>
-              <a:t>Art. 3: their own record, at once</a:t>
+              <a:t>Art. 67: one application</a:t>
             </a:r>
           </a:p>
         </p:txBody>
@@ -3696,7 +3696,7 @@
                 </a:solidFill>
                 <a:latin typeface="Calibri"/>
               </a:rPr>
-              <a:t>Doctors</a:t>
+              <a:t>Data holders</a:t>
             </a:r>
           </a:p>
         </p:txBody>
@@ -3735,7 +3735,7 @@
                 </a:solidFill>
                 <a:latin typeface="Calibri"/>
               </a:rPr>
-              <a:t>Hospitals in another region cannot see the care a patient already received, so tests are repeated.</a:t>
+              <a:t>Hospitals and registries hold the data with no way to publish what they hold, or to deliver it on a deadline.</a:t>
             </a:r>
           </a:p>
         </p:txBody>
@@ -3774,7 +3774,7 @@
                 </a:solidFill>
                 <a:latin typeface="Calibri"/>
               </a:rPr>
-              <a:t>Art. 11: access at the bedside</a:t>
+              <a:t>Art. 60: three months to deliver</a:t>
             </a:r>
           </a:p>
         </p:txBody>
@@ -3840,7 +3840,7 @@
             <a:avLst/>
           </a:prstGeom>
           <a:solidFill>
-            <a:srgbClr val="2A9D8F"/>
+            <a:srgbClr val="C31E2E"/>
           </a:solidFill>
           <a:ln>
             <a:noFill/>
@@ -3903,7 +3903,7 @@
                 </a:solidFill>
                 <a:latin typeface="Calibri"/>
               </a:rPr>
-              <a:t>Across Europe</a:t>
+              <a:t>The regulator</a:t>
             </a:r>
           </a:p>
         </p:txBody>
@@ -3942,7 +3942,7 @@
                 </a:solidFill>
                 <a:latin typeface="Calibri"/>
               </a:rPr>
-              <a:t>A prescription issued in Spain should be dispensable in any Member State. Today it usually is not.</a:t>
+              <a:t>Every approval is bespoke, and nobody outside can see which permits were issued, or why.</a:t>
             </a:r>
           </a:p>
         </p:txBody>
@@ -3977,11 +3977,11 @@
             <a:r>
               <a:rPr sz="1100" b="1">
                 <a:solidFill>
-                  <a:srgbClr val="2A9D8F"/>
+                  <a:srgbClr val="C31E2E"/>
                 </a:solidFill>
                 <a:latin typeface="Calibri"/>
               </a:rPr>
-              <a:t>Art. 23: MyHealth@EU</a:t>
+              <a:t>Art. 68: one permit, published</a:t>
             </a:r>
           </a:p>
         </p:txBody>
@@ -4098,7 +4098,7 @@
                 </a:solidFill>
                 <a:latin typeface="Calibri"/>
               </a:rPr>
-              <a:t>Primary use, Chapter II of Regulation (EU) 2025/327  ·  data.europa.eu/eli/reg/2025/327/oj</a:t>
+              <a:t>Secondary use, Chapter IV of Regulation (EU) 2025/327  ·  data.europa.eu/eli/reg/2025/327/oj</a:t>
             </a:r>
           </a:p>
         </p:txBody>
@@ -4199,7 +4199,7 @@
                 </a:solidFill>
                 <a:latin typeface="Calibri"/>
               </a:rPr>
-              <a:t>When care does not follow the citizen</a:t>
+              <a:t>One question, asked once</a:t>
             </a:r>
           </a:p>
         </p:txBody>
@@ -4238,7 +4238,7 @@
                 </a:solidFill>
                 <a:latin typeface="Calibri"/>
               </a:rPr>
-              <a:t>Primary use. Continuous, safe care across all 17 regions, and across the border.</a:t>
+              <a:t>What the Regulation requires for secondary use, and what it puts in place to make it work.</a:t>
             </a:r>
           </a:p>
         </p:txBody>
@@ -4430,7 +4430,7 @@
                 </a:solidFill>
                 <a:latin typeface="Calibri"/>
               </a:rPr>
-              <a:t>What the citizen gets, by right</a:t>
+              <a:t>What EHDS puts in place</a:t>
             </a:r>
           </a:p>
         </p:txBody>
@@ -4469,7 +4469,7 @@
                 </a:solidFill>
                 <a:latin typeface="Calibri"/>
               </a:rPr>
-              <a:t>•  See their own record, at once and free   Art. 3</a:t>
+              <a:t>•  One application, however many regions   Art. 67</a:t>
             </a:r>
           </a:p>
           <a:p>
@@ -4485,7 +4485,7 @@
                 </a:solidFill>
                 <a:latin typeface="Calibri"/>
               </a:rPr>
-              <a:t>•  Add their own information to it   Art. 5</a:t>
+              <a:t>•  A permit decision in three months   Art. 68(4)</a:t>
             </a:r>
           </a:p>
           <a:p>
@@ -4501,7 +4501,7 @@
                 </a:solidFill>
                 <a:latin typeface="Calibri"/>
               </a:rPr>
-              <a:t>•  Have what is wrong corrected   Art. 6</a:t>
+              <a:t>•  Holders deliver within three months   Art. 60(2)</a:t>
             </a:r>
           </a:p>
           <a:p>
@@ -4517,7 +4517,7 @@
                 </a:solidFill>
                 <a:latin typeface="Calibri"/>
               </a:rPr>
-              <a:t>•  Take a copy anywhere in the Union   Art. 7</a:t>
+              <a:t>•  Analysis inside a secure environment   Art. 73</a:t>
             </a:r>
           </a:p>
           <a:p>
@@ -4533,7 +4533,7 @@
                 </a:solidFill>
                 <a:latin typeface="Calibri"/>
               </a:rPr>
-              <a:t>•  Restrict who is allowed to look   Art. 8</a:t>
+              <a:t>•  Only results leave, never the rows   Art. 73(2)</a:t>
             </a:r>
           </a:p>
           <a:p>
@@ -4549,23 +4549,7 @@
                 </a:solidFill>
                 <a:latin typeface="Calibri"/>
               </a:rPr>
-              <a:t>•  See who actually did look   Art. 9</a:t>
-            </a:r>
-          </a:p>
-          <a:p>
-            <a:pPr>
-              <a:lnSpc>
-                <a:spcPct val="108000"/>
-              </a:lnSpc>
-            </a:pPr>
-            <a:r>
-              <a:rPr sz="1250" b="0">
-                <a:solidFill>
-                  <a:srgbClr val="4F5560"/>
-                </a:solidFill>
-                <a:latin typeface="Calibri"/>
-              </a:rPr>
-              <a:t>•  Opt out of primary use entirely   Art. 10</a:t>
+              <a:t>•  Every permit published, with reasons   Art. 57(1)(j)</a:t>
             </a:r>
           </a:p>
         </p:txBody>
@@ -4694,7 +4678,7 @@
                 </a:solidFill>
                 <a:latin typeface="Calibri"/>
               </a:rPr>
-              <a:t>And it has to actually work</a:t>
+              <a:t>And the price is fixed by law</a:t>
             </a:r>
           </a:p>
         </p:txBody>
@@ -4733,7 +4717,7 @@
                 </a:solidFill>
                 <a:latin typeface="Calibri"/>
               </a:rPr>
-              <a:t>One European exchange format, Art. 15. Identification that holds across a border, Art. 16. A national gateway into MyHealth@EU, Art. 23.</a:t>
+              <a:t>Fees recover cost only, transparent and non-discriminatory, with reduced rates for public bodies and university researchers. Art. 62.</a:t>
             </a:r>
           </a:p>
         </p:txBody>
@@ -4772,7 +4756,7 @@
                 </a:solidFill>
                 <a:latin typeface="Calibri"/>
               </a:rPr>
-              <a:t>Reg. (EU) 2025/327, Art. 3 to 10, 15, 16, 23</a:t>
+              <a:t>Reg. (EU) 2025/327, Art. 57, 60, 62, 67, 68, 73</a:t>
             </a:r>
           </a:p>
         </p:txBody>
@@ -4873,7 +4857,7 @@
                 </a:solidFill>
                 <a:latin typeface="Calibri"/>
               </a:rPr>
-              <a:t>Already working, on synthetic data</a:t>
+              <a:t>What the demonstration shows</a:t>
             </a:r>
           </a:p>
         </p:txBody>
@@ -4912,7 +4896,7 @@
                 </a:solidFill>
                 <a:latin typeface="Calibri"/>
               </a:rPr>
-              <a:t>The demonstrator's own patient view, and the six data categories Chapter II turns on.</a:t>
+              <a:t>The whole journey, from registration to an audited result. Synthetic data, real protocols.</a:t>
             </a:r>
           </a:p>
         </p:txBody>
@@ -4958,7 +4942,7 @@
       </p:sp>
       <p:pic>
         <p:nvPicPr>
-          <p:cNvPr id="6" name="Picture 5" descr="image.png"/>
+          <p:cNvPr id="6" name="Picture 5" descr="ehds-secondary-journey-bilingual.png"/>
           <p:cNvPicPr>
             <a:picLocks noChangeAspect="1"/>
           </p:cNvPicPr>
@@ -4972,8 +4956,8 @@
         </p:blipFill>
         <p:spPr>
           <a:xfrm>
-            <a:off x="548640" y="1325880"/>
-            <a:ext cx="3922776" cy="4937760"/>
+            <a:off x="1645920" y="1325880"/>
+            <a:ext cx="8897112" cy="4937760"/>
           </a:xfrm>
           <a:prstGeom prst="rect">
             <a:avLst/>
@@ -4982,482 +4966,7 @@
       </p:pic>
       <p:sp>
         <p:nvSpPr>
-          <p:cNvPr id="7" name="Rounded Rectangle 6"/>
-          <p:cNvSpPr/>
-          <p:nvPr/>
-        </p:nvSpPr>
-        <p:spPr>
-          <a:xfrm>
-            <a:off x="4754880" y="1325880"/>
-            <a:ext cx="6885432" cy="2651760"/>
-          </a:xfrm>
-          <a:prstGeom prst="roundRect">
-            <a:avLst>
-              <a:gd name="adj" fmla="val 5000"/>
-            </a:avLst>
-          </a:prstGeom>
-          <a:solidFill>
-            <a:srgbClr val="F4EFE6"/>
-          </a:solidFill>
-          <a:ln>
-            <a:noFill/>
-          </a:ln>
-          <a:effectLst/>
-        </p:spPr>
-        <p:style>
-          <a:lnRef idx="1">
-            <a:schemeClr val="accent1"/>
-          </a:lnRef>
-          <a:fillRef idx="3">
-            <a:schemeClr val="accent1"/>
-          </a:fillRef>
-          <a:effectRef idx="2">
-            <a:schemeClr val="accent1"/>
-          </a:effectRef>
-          <a:fontRef idx="minor">
-            <a:schemeClr val="lt1"/>
-          </a:fontRef>
-        </p:style>
-        <p:txBody>
-          <a:bodyPr rtlCol="0" anchor="ctr"/>
-          <a:lstStyle/>
-          <a:p>
-            <a:pPr algn="ctr"/>
-          </a:p>
-        </p:txBody>
-      </p:sp>
-      <p:sp>
-        <p:nvSpPr>
-          <p:cNvPr id="8" name="Rectangle 7"/>
-          <p:cNvSpPr/>
-          <p:nvPr/>
-        </p:nvSpPr>
-        <p:spPr>
-          <a:xfrm>
-            <a:off x="4754880" y="1325880"/>
-            <a:ext cx="6885432" cy="384048"/>
-          </a:xfrm>
-          <a:prstGeom prst="rect">
-            <a:avLst/>
-          </a:prstGeom>
-          <a:solidFill>
-            <a:srgbClr val="143D59"/>
-          </a:solidFill>
-          <a:ln>
-            <a:noFill/>
-          </a:ln>
-          <a:effectLst/>
-        </p:spPr>
-        <p:style>
-          <a:lnRef idx="1">
-            <a:schemeClr val="accent1"/>
-          </a:lnRef>
-          <a:fillRef idx="3">
-            <a:schemeClr val="accent1"/>
-          </a:fillRef>
-          <a:effectRef idx="2">
-            <a:schemeClr val="accent1"/>
-          </a:effectRef>
-          <a:fontRef idx="minor">
-            <a:schemeClr val="lt1"/>
-          </a:fontRef>
-        </p:style>
-        <p:txBody>
-          <a:bodyPr rtlCol="0" anchor="ctr"/>
-          <a:lstStyle/>
-          <a:p>
-            <a:pPr algn="ctr"/>
-          </a:p>
-        </p:txBody>
-      </p:sp>
-      <p:sp>
-        <p:nvSpPr>
-          <p:cNvPr id="9" name="TextBox 8"/>
-          <p:cNvSpPr txBox="1"/>
-          <p:nvPr/>
-        </p:nvSpPr>
-        <p:spPr>
-          <a:xfrm>
-            <a:off x="4956048" y="1399032"/>
-            <a:ext cx="6483096" cy="310896"/>
-          </a:xfrm>
-          <a:prstGeom prst="rect">
-            <a:avLst/>
-          </a:prstGeom>
-          <a:noFill/>
-        </p:spPr>
-        <p:txBody>
-          <a:bodyPr wrap="square" lIns="0" rIns="0" tIns="0" bIns="0">
-            <a:spAutoFit/>
-          </a:bodyPr>
-          <a:lstStyle/>
-          <a:p>
-            <a:pPr>
-              <a:lnSpc>
-                <a:spcPct val="100000"/>
-              </a:lnSpc>
-            </a:pPr>
-            <a:r>
-              <a:rPr sz="1600" b="1">
-                <a:solidFill>
-                  <a:srgbClr val="FFFFFF"/>
-                </a:solidFill>
-                <a:latin typeface="Calibri"/>
-              </a:rPr>
-              <a:t>The six priority categories, and when they must be live</a:t>
-            </a:r>
-          </a:p>
-        </p:txBody>
-      </p:sp>
-      <p:sp>
-        <p:nvSpPr>
-          <p:cNvPr id="10" name="TextBox 9"/>
-          <p:cNvSpPr txBox="1"/>
-          <p:nvPr/>
-        </p:nvSpPr>
-        <p:spPr>
-          <a:xfrm>
-            <a:off x="4956048" y="1892807"/>
-            <a:ext cx="6483096" cy="1920239"/>
-          </a:xfrm>
-          <a:prstGeom prst="rect">
-            <a:avLst/>
-          </a:prstGeom>
-          <a:noFill/>
-        </p:spPr>
-        <p:txBody>
-          <a:bodyPr wrap="square" lIns="0" rIns="0" tIns="0" bIns="0">
-            <a:spAutoFit/>
-          </a:bodyPr>
-          <a:lstStyle/>
-          <a:p>
-            <a:pPr>
-              <a:lnSpc>
-                <a:spcPct val="108000"/>
-              </a:lnSpc>
-            </a:pPr>
-            <a:r>
-              <a:rPr sz="1300" b="1">
-                <a:solidFill>
-                  <a:srgbClr val="143D59"/>
-                </a:solidFill>
-                <a:latin typeface="Calibri"/>
-              </a:rPr>
-              <a:t>2029    </a:t>
-            </a:r>
-            <a:r>
-              <a:rPr sz="1300" b="0">
-                <a:solidFill>
-                  <a:srgbClr val="4F5560"/>
-                </a:solidFill>
-                <a:latin typeface="Calibri"/>
-              </a:rPr>
-              <a:t>Patient summaries · electronic prescriptions · electronic dispensations</a:t>
-            </a:r>
-          </a:p>
-          <a:p>
-            <a:pPr>
-              <a:lnSpc>
-                <a:spcPct val="108000"/>
-              </a:lnSpc>
-            </a:pPr>
-            <a:r>
-              <a:rPr sz="1300" b="0">
-                <a:solidFill>
-                  <a:srgbClr val="4F5560"/>
-                </a:solidFill>
-                <a:latin typeface="Calibri"/>
-              </a:rPr>
-              <a:t/>
-            </a:r>
-          </a:p>
-          <a:p>
-            <a:pPr>
-              <a:lnSpc>
-                <a:spcPct val="108000"/>
-              </a:lnSpc>
-            </a:pPr>
-            <a:r>
-              <a:rPr sz="1300" b="1">
-                <a:solidFill>
-                  <a:srgbClr val="143D59"/>
-                </a:solidFill>
-                <a:latin typeface="Calibri"/>
-              </a:rPr>
-              <a:t>2031    </a:t>
-            </a:r>
-            <a:r>
-              <a:rPr sz="1300" b="0">
-                <a:solidFill>
-                  <a:srgbClr val="4F5560"/>
-                </a:solidFill>
-                <a:latin typeface="Calibri"/>
-              </a:rPr>
-              <a:t>Medical imaging and reports · test results including laboratory ·</a:t>
-            </a:r>
-          </a:p>
-          <a:p>
-            <a:pPr>
-              <a:lnSpc>
-                <a:spcPct val="108000"/>
-              </a:lnSpc>
-            </a:pPr>
-            <a:r>
-              <a:rPr sz="1300" b="1">
-                <a:solidFill>
-                  <a:srgbClr val="143D59"/>
-                </a:solidFill>
-                <a:latin typeface="Calibri"/>
-              </a:rPr>
-              <a:t>              </a:t>
-            </a:r>
-            <a:r>
-              <a:rPr sz="1300" b="0">
-                <a:solidFill>
-                  <a:srgbClr val="4F5560"/>
-                </a:solidFill>
-                <a:latin typeface="Calibri"/>
-              </a:rPr>
-              <a:t>discharge reports</a:t>
-            </a:r>
-          </a:p>
-          <a:p>
-            <a:pPr>
-              <a:lnSpc>
-                <a:spcPct val="108000"/>
-              </a:lnSpc>
-            </a:pPr>
-            <a:r>
-              <a:rPr sz="1300" b="0">
-                <a:solidFill>
-                  <a:srgbClr val="4F5560"/>
-                </a:solidFill>
-                <a:latin typeface="Calibri"/>
-              </a:rPr>
-              <a:t/>
-            </a:r>
-          </a:p>
-          <a:p>
-            <a:pPr>
-              <a:lnSpc>
-                <a:spcPct val="108000"/>
-              </a:lnSpc>
-            </a:pPr>
-            <a:r>
-              <a:rPr sz="1300" b="0">
-                <a:solidFill>
-                  <a:srgbClr val="4F5560"/>
-                </a:solidFill>
-                <a:latin typeface="Calibri"/>
-              </a:rPr>
-              <a:t>Art. 14(1) and Annex I. Every right on the previous slide attaches to these six.</a:t>
-            </a:r>
-          </a:p>
-        </p:txBody>
-      </p:sp>
-      <p:sp>
-        <p:nvSpPr>
-          <p:cNvPr id="11" name="Rounded Rectangle 10"/>
-          <p:cNvSpPr/>
-          <p:nvPr/>
-        </p:nvSpPr>
-        <p:spPr>
-          <a:xfrm>
-            <a:off x="4754880" y="4160520"/>
-            <a:ext cx="6885432" cy="2103120"/>
-          </a:xfrm>
-          <a:prstGeom prst="roundRect">
-            <a:avLst>
-              <a:gd name="adj" fmla="val 5000"/>
-            </a:avLst>
-          </a:prstGeom>
-          <a:solidFill>
-            <a:srgbClr val="F4EFE6"/>
-          </a:solidFill>
-          <a:ln>
-            <a:noFill/>
-          </a:ln>
-          <a:effectLst/>
-        </p:spPr>
-        <p:style>
-          <a:lnRef idx="1">
-            <a:schemeClr val="accent1"/>
-          </a:lnRef>
-          <a:fillRef idx="3">
-            <a:schemeClr val="accent1"/>
-          </a:fillRef>
-          <a:effectRef idx="2">
-            <a:schemeClr val="accent1"/>
-          </a:effectRef>
-          <a:fontRef idx="minor">
-            <a:schemeClr val="lt1"/>
-          </a:fontRef>
-        </p:style>
-        <p:txBody>
-          <a:bodyPr rtlCol="0" anchor="ctr"/>
-          <a:lstStyle/>
-          <a:p>
-            <a:pPr algn="ctr"/>
-          </a:p>
-        </p:txBody>
-      </p:sp>
-      <p:sp>
-        <p:nvSpPr>
-          <p:cNvPr id="12" name="Rectangle 11"/>
-          <p:cNvSpPr/>
-          <p:nvPr/>
-        </p:nvSpPr>
-        <p:spPr>
-          <a:xfrm>
-            <a:off x="4754880" y="4160520"/>
-            <a:ext cx="6885432" cy="384048"/>
-          </a:xfrm>
-          <a:prstGeom prst="rect">
-            <a:avLst/>
-          </a:prstGeom>
-          <a:solidFill>
-            <a:srgbClr val="2A9D8F"/>
-          </a:solidFill>
-          <a:ln>
-            <a:noFill/>
-          </a:ln>
-          <a:effectLst/>
-        </p:spPr>
-        <p:style>
-          <a:lnRef idx="1">
-            <a:schemeClr val="accent1"/>
-          </a:lnRef>
-          <a:fillRef idx="3">
-            <a:schemeClr val="accent1"/>
-          </a:fillRef>
-          <a:effectRef idx="2">
-            <a:schemeClr val="accent1"/>
-          </a:effectRef>
-          <a:fontRef idx="minor">
-            <a:schemeClr val="lt1"/>
-          </a:fontRef>
-        </p:style>
-        <p:txBody>
-          <a:bodyPr rtlCol="0" anchor="ctr"/>
-          <a:lstStyle/>
-          <a:p>
-            <a:pPr algn="ctr"/>
-          </a:p>
-        </p:txBody>
-      </p:sp>
-      <p:sp>
-        <p:nvSpPr>
-          <p:cNvPr id="13" name="TextBox 12"/>
-          <p:cNvSpPr txBox="1"/>
-          <p:nvPr/>
-        </p:nvSpPr>
-        <p:spPr>
-          <a:xfrm>
-            <a:off x="4956048" y="4233672"/>
-            <a:ext cx="6483096" cy="310896"/>
-          </a:xfrm>
-          <a:prstGeom prst="rect">
-            <a:avLst/>
-          </a:prstGeom>
-          <a:noFill/>
-        </p:spPr>
-        <p:txBody>
-          <a:bodyPr wrap="square" lIns="0" rIns="0" tIns="0" bIns="0">
-            <a:spAutoFit/>
-          </a:bodyPr>
-          <a:lstStyle/>
-          <a:p>
-            <a:pPr>
-              <a:lnSpc>
-                <a:spcPct val="100000"/>
-              </a:lnSpc>
-            </a:pPr>
-            <a:r>
-              <a:rPr sz="1600" b="1">
-                <a:solidFill>
-                  <a:srgbClr val="FFFFFF"/>
-                </a:solidFill>
-                <a:latin typeface="Calibri"/>
-              </a:rPr>
-              <a:t>What you are looking at</a:t>
-            </a:r>
-          </a:p>
-        </p:txBody>
-      </p:sp>
-      <p:sp>
-        <p:nvSpPr>
-          <p:cNvPr id="14" name="TextBox 13"/>
-          <p:cNvSpPr txBox="1"/>
-          <p:nvPr/>
-        </p:nvSpPr>
-        <p:spPr>
-          <a:xfrm>
-            <a:off x="4956048" y="4727448"/>
-            <a:ext cx="6483096" cy="1371599"/>
-          </a:xfrm>
-          <a:prstGeom prst="rect">
-            <a:avLst/>
-          </a:prstGeom>
-          <a:noFill/>
-        </p:spPr>
-        <p:txBody>
-          <a:bodyPr wrap="square" lIns="0" rIns="0" tIns="0" bIns="0">
-            <a:spAutoFit/>
-          </a:bodyPr>
-          <a:lstStyle/>
-          <a:p>
-            <a:pPr>
-              <a:lnSpc>
-                <a:spcPct val="108000"/>
-              </a:lnSpc>
-            </a:pPr>
-            <a:r>
-              <a:rPr sz="1200" b="0">
-                <a:solidFill>
-                  <a:srgbClr val="4F5560"/>
-                </a:solidFill>
-                <a:latin typeface="Calibri"/>
-              </a:rPr>
-              <a:t>The patient view of the demonstrator. The page labels itself EHDS Art. 3 and GDPR Art. 15, shows HL7 FHIR R4 events mapped to OMOP concepts on one clinical timeline, and logs every access.</a:t>
-            </a:r>
-          </a:p>
-          <a:p>
-            <a:pPr>
-              <a:lnSpc>
-                <a:spcPct val="108000"/>
-              </a:lnSpc>
-            </a:pPr>
-            <a:r>
-              <a:rPr sz="1200" b="0">
-                <a:solidFill>
-                  <a:srgbClr val="4F5560"/>
-                </a:solidFill>
-                <a:latin typeface="Calibri"/>
-              </a:rPr>
-              <a:t/>
-            </a:r>
-          </a:p>
-          <a:p>
-            <a:pPr>
-              <a:lnSpc>
-                <a:spcPct val="108000"/>
-              </a:lnSpc>
-            </a:pPr>
-            <a:r>
-              <a:rPr sz="1200" b="0">
-                <a:solidFill>
-                  <a:srgbClr val="4F5560"/>
-                </a:solidFill>
-                <a:latin typeface="Calibri"/>
-              </a:rPr>
-              <a:t>Live at ehds.mabu.red with real sign-in, or on the static mirror that cannot fail on the day.</a:t>
-            </a:r>
-          </a:p>
-        </p:txBody>
-      </p:sp>
-      <p:sp>
-        <p:nvSpPr>
-          <p:cNvPr id="15" name="TextBox 14"/>
+          <p:cNvPr id="7" name="TextBox 6"/>
           <p:cNvSpPr txBox="1"/>
           <p:nvPr/>
         </p:nvSpPr>
@@ -5489,7 +4998,7 @@
                 </a:solidFill>
                 <a:latin typeface="Calibri"/>
               </a:rPr>
-              <a:t>Reg. (EU) 2025/327, Art. 14(1), Annex I, Art. 105  ·  github.com/ma3u/MinimumViableHealthDataspacev2</a:t>
+              <a:t>Live: ehds.mabu.red  ·  Mirror: ma3u.github.io/MinimumViableHealthDataspacev2  ·  issue #27</a:t>
             </a:r>
           </a:p>
         </p:txBody>
@@ -5590,7 +5099,7 @@
                 </a:solidFill>
                 <a:latin typeface="Calibri"/>
               </a:rPr>
-              <a:t>A proposed operating model for primary use</a:t>
+              <a:t>A proposed operating model for the EHDS</a:t>
             </a:r>
           </a:p>
         </p:txBody>
@@ -5629,7 +5138,7 @@
                 </a:solidFill>
                 <a:latin typeface="Calibri"/>
               </a:rPr>
-              <a:t>Chapter II cut the way Catena-X cuts a dataspace. Two of the three layers are already law.</a:t>
+              <a:t>The Catena-X operating model, re-cut for Regulation (EU) 2025/327. Two of the three layers are already law.</a:t>
             </a:r>
           </a:p>
         </p:txBody>
@@ -5675,7 +5184,7 @@
       </p:sp>
       <p:pic>
         <p:nvPicPr>
-          <p:cNvPr id="6" name="Picture 5" descr="ehds-operating-model-primary.png"/>
+          <p:cNvPr id="6" name="Picture 5" descr="ehds-operating-model-wide.png"/>
           <p:cNvPicPr>
             <a:picLocks noChangeAspect="1"/>
           </p:cNvPicPr>
@@ -6078,7 +5587,7 @@
                 </a:solidFill>
                 <a:latin typeface="Calibri"/>
               </a:rPr>
-              <a:t>•  Which body is the digital health authority, and is it staffed?   Art. 19</a:t>
+              <a:t>•  One access body, or several with a coordinator?   Art. 55(1)</a:t>
             </a:r>
           </a:p>
           <a:p>
@@ -6094,7 +5603,7 @@
                 </a:solidFill>
                 <a:latin typeface="Calibri"/>
               </a:rPr>
-              <a:t>•  Which body is the national contact point for digital health?   Art. 23</a:t>
+              <a:t>•  Is the national contact point that same body, or separate?   Art. 75(1)</a:t>
             </a:r>
           </a:p>
           <a:p>
@@ -6110,7 +5619,7 @@
                 </a:solidFill>
                 <a:latin typeface="Calibri"/>
               </a:rPr>
-              <a:t>•  Are the 17 regions able to register the six categories?   Art. 13, 14</a:t>
+              <a:t>•  Does the March 2027 designation have an owner and a budget line?</a:t>
             </a:r>
           </a:p>
           <a:p>
@@ -6126,7 +5635,7 @@
                 </a:solidFill>
                 <a:latin typeface="Calibri"/>
               </a:rPr>
-              <a:t>•  Who converts records into the European format, and who pays?   Art. 15</a:t>
+              <a:t>•  Who holds the inventory of the Art. 51 data categories?</a:t>
             </a:r>
           </a:p>
           <a:p>
@@ -6142,7 +5651,7 @@
                 </a:solidFill>
                 <a:latin typeface="Calibri"/>
               </a:rPr>
-              <a:t>•  In-house entity, joint venture, or tendered concession, decided by when?</a:t>
+              <a:t>•  In-house entity, joint venture, or tendered concession, and by when?</a:t>
             </a:r>
           </a:p>
         </p:txBody>
@@ -6503,7 +6012,7 @@
                 </a:solidFill>
                 <a:latin typeface="Calibri"/>
               </a:rPr>
-              <a:t>Better care for every citizen. Patient summaries, prescriptions and dispensations have to be live in March 2029, and counting procurement that is about two release years away.</a:t>
+              <a:t>The access body and the national contact point must be designated by March 2027, and Chapter IV applies in full from March 2029. Counting procurement, that is about two release years away.</a:t>
             </a:r>
           </a:p>
         </p:txBody>
@@ -6542,7 +6051,7 @@
                 </a:solidFill>
                 <a:latin typeface="Calibri"/>
               </a:rPr>
-              <a:t>Full deck: spain-ehds-ministry-deck.pptx  ·  Paper: docs/ehds-operating-company.md</a:t>
+              <a:t>Reg. (EU) 2025/327, Art. 55(6), 75(1), 105  ·  Paper: docs/ehds-operating-company.md</a:t>
             </a:r>
           </a:p>
         </p:txBody>

--- a/docs/demos/spain-ehds-5-slides.pptx
+++ b/docs/demos/spain-ehds-5-slides.pptx
@@ -5138,7 +5138,7 @@
                 </a:solidFill>
                 <a:latin typeface="Calibri"/>
               </a:rPr>
-              <a:t>The Catena-X operating model, re-cut for Regulation (EU) 2025/327. Two of the three layers are already law.</a:t>
+              <a:t>The Catena-X operating model, re-cut for Regulation (EU) 2025/327. One of the four layers is open.</a:t>
             </a:r>
           </a:p>
         </p:txBody>
@@ -5198,8 +5198,8 @@
         </p:blipFill>
         <p:spPr>
           <a:xfrm>
-            <a:off x="548640" y="1371600"/>
-            <a:ext cx="11091672" cy="4754880"/>
+            <a:off x="548640" y="1783080"/>
+            <a:ext cx="11091672" cy="4069080"/>
           </a:xfrm>
           <a:prstGeom prst="rect">
             <a:avLst/>

--- a/docs/demos/spain-ehds-5-slides.pptx
+++ b/docs/demos/spain-ehds-5-slides.pptx
@@ -5138,7 +5138,7 @@
                 </a:solidFill>
                 <a:latin typeface="Calibri"/>
               </a:rPr>
-              <a:t>The Catena-X operating model, re-cut for Regulation (EU) 2025/327. One of the four layers is open.</a:t>
+              <a:t>The Catena-X operating model, re-cut for Regulation (EU) 2025/327. One of the three layers is open.</a:t>
             </a:r>
           </a:p>
         </p:txBody>
@@ -5198,8 +5198,8 @@
         </p:blipFill>
         <p:spPr>
           <a:xfrm>
-            <a:off x="548640" y="1783080"/>
-            <a:ext cx="11091672" cy="4069080"/>
+            <a:off x="548640" y="2039112"/>
+            <a:ext cx="11091672" cy="3602736"/>
           </a:xfrm>
           <a:prstGeom prst="rect">
             <a:avLst/>

--- a/docs/demos/spain-ehds-5-slides.pptx
+++ b/docs/demos/spain-ehds-5-slides.pptx
@@ -5099,7 +5099,7 @@
                 </a:solidFill>
                 <a:latin typeface="Calibri"/>
               </a:rPr>
-              <a:t>A proposed operating model for the EHDS</a:t>
+              <a:t>What Catena-X teaches an EHDS operating company</a:t>
             </a:r>
           </a:p>
         </p:txBody>
@@ -5138,7 +5138,7 @@
                 </a:solidFill>
                 <a:latin typeface="Calibri"/>
               </a:rPr>
-              <a:t>The Catena-X operating model, re-cut for Regulation (EU) 2025/327. One of the three layers is open.</a:t>
+              <a:t>Six lessons from running the automotive dataspace, and where each one lands in the Regulation.</a:t>
             </a:r>
           </a:p>
         </p:txBody>
@@ -5198,8 +5198,8 @@
         </p:blipFill>
         <p:spPr>
           <a:xfrm>
-            <a:off x="548640" y="2039112"/>
-            <a:ext cx="11091672" cy="3602736"/>
+            <a:off x="608076" y="1353312"/>
+            <a:ext cx="10972800" cy="4910328"/>
           </a:xfrm>
           <a:prstGeom prst="rect">
             <a:avLst/>
